--- a/usdkrw_presentation_v2.pptx
+++ b/usdkrw_presentation_v2.pptx
@@ -13,6 +13,7 @@
     <p:sldId id="261" r:id="rId12"/>
     <p:sldId id="262" r:id="rId13"/>
     <p:sldId id="263" r:id="rId14"/>
+    <p:sldId id="264" r:id="rId15"/>
   </p:sldIdLst>
   <p:sldSz cx="12188952" cy="6858000" type="screen4x3"/>
   <p:notesSz cx="6858000" cy="9144000"/>
@@ -13966,7 +13967,7 @@
                   <a:srgbClr val="22C55E"/>
                 </a:solidFill>
               </a:rPr>
-              <a:t>K E Y   I N S I G H T S  ·  핵 심   인 사 이 트</a:t>
+              <a:t>B A C K T E S T   V I S U A L I Z A T I O N  ·  백 테 스 트   결 과</a:t>
             </a:r>
           </a:p>
         </p:txBody>
@@ -14000,7 +14001,7 @@
                   <a:srgbClr val="FFFFFF"/>
                 </a:solidFill>
               </a:rPr>
-              <a:t>핵심 인사이트</a:t>
+              <a:t>D+1 예측 vs 실제  |  최근 30 영업일 비교</a:t>
             </a:r>
           </a:p>
         </p:txBody>
@@ -14048,51 +14049,30 @@
           </a:p>
         </p:txBody>
       </p:sp>
-      <p:sp>
-        <p:nvSpPr>
-          <p:cNvPr id="6" name="Rectangle 5"/>
-          <p:cNvSpPr/>
-          <p:nvPr/>
-        </p:nvSpPr>
-        <p:spPr>
-          <a:xfrm>
-            <a:off x="411480" y="1481328"/>
-            <a:ext cx="5440680" cy="1920240"/>
-          </a:xfrm>
-          <a:prstGeom prst="rect">
-            <a:avLst/>
-          </a:prstGeom>
-          <a:solidFill>
-            <a:srgbClr val="0F1E30"/>
-          </a:solidFill>
-          <a:ln w="19050">
-            <a:solidFill>
-              <a:srgbClr val="22C55E"/>
-            </a:solidFill>
-          </a:ln>
-        </p:spPr>
-        <p:style>
-          <a:lnRef idx="1">
-            <a:schemeClr val="accent1"/>
-          </a:lnRef>
-          <a:fillRef idx="3">
-            <a:schemeClr val="accent1"/>
-          </a:fillRef>
-          <a:effectRef idx="2">
-            <a:schemeClr val="accent1"/>
-          </a:effectRef>
-          <a:fontRef idx="minor">
-            <a:schemeClr val="lt1"/>
-          </a:fontRef>
-        </p:style>
-        <p:txBody>
-          <a:bodyPr rtlCol="0" anchor="ctr"/>
-          <a:lstStyle/>
-          <a:p>
-            <a:pPr algn="ctr"/>
-          </a:p>
-        </p:txBody>
-      </p:sp>
+      <p:pic>
+        <p:nvPicPr>
+          <p:cNvPr id="6" name="Picture 5" descr="backtest_visual.png"/>
+          <p:cNvPicPr>
+            <a:picLocks noChangeAspect="1"/>
+          </p:cNvPicPr>
+          <p:nvPr/>
+        </p:nvPicPr>
+        <p:blipFill>
+          <a:blip r:embed="rId2"/>
+          <a:stretch>
+            <a:fillRect/>
+          </a:stretch>
+        </p:blipFill>
+        <p:spPr>
+          <a:xfrm>
+            <a:off x="2103120" y="1325880"/>
+            <a:ext cx="7982712" cy="5486400"/>
+          </a:xfrm>
+          <a:prstGeom prst="rect">
+            <a:avLst/>
+          </a:prstGeom>
+        </p:spPr>
+      </p:pic>
       <p:sp>
         <p:nvSpPr>
           <p:cNvPr id="7" name="TextBox 6"/>
@@ -14101,484 +14081,28 @@
         </p:nvSpPr>
         <p:spPr>
           <a:xfrm>
-            <a:off x="576072" y="1591056"/>
-            <a:ext cx="5166360" cy="384048"/>
-          </a:xfrm>
-          <a:prstGeom prst="rect">
-            <a:avLst/>
-          </a:prstGeom>
-          <a:noFill/>
-        </p:spPr>
-        <p:txBody>
-          <a:bodyPr wrap="square">
-            <a:spAutoFit/>
-          </a:bodyPr>
-          <a:lstStyle/>
-          <a:p>
-            <a:pPr algn="l"/>
-            <a:r>
-              <a:rPr sz="1600" b="1" i="0">
-                <a:solidFill>
-                  <a:srgbClr val="22C55E"/>
-                </a:solidFill>
-              </a:rPr>
-              <a:t>⚡  앙상블이 RMSE 최소</a:t>
-            </a:r>
-          </a:p>
-        </p:txBody>
-      </p:sp>
-      <p:sp>
-        <p:nvSpPr>
-          <p:cNvPr id="8" name="TextBox 7"/>
-          <p:cNvSpPr txBox="1"/>
-          <p:nvPr/>
-        </p:nvSpPr>
-        <p:spPr>
-          <a:xfrm>
-            <a:off x="576072" y="2029968"/>
-            <a:ext cx="5166360" cy="1188720"/>
-          </a:xfrm>
-          <a:prstGeom prst="rect">
-            <a:avLst/>
-          </a:prstGeom>
-          <a:noFill/>
-        </p:spPr>
-        <p:txBody>
-          <a:bodyPr wrap="square">
-            <a:spAutoFit/>
-          </a:bodyPr>
-          <a:lstStyle/>
-          <a:p>
-            <a:pPr algn="l"/>
-            <a:r>
-              <a:rPr sz="1300" b="0" i="0">
-                <a:solidFill>
-                  <a:srgbClr val="94A3B8"/>
-                </a:solidFill>
-              </a:rPr>
-              <a:t>Ridge 앙상블 7.45원 — 단일 LGB(7.85원) 대비 5% 개선
-LSTM의 Sharpe 기여를 흡수해 최적 결합</a:t>
-            </a:r>
-          </a:p>
-        </p:txBody>
-      </p:sp>
-      <p:sp>
-        <p:nvSpPr>
-          <p:cNvPr id="9" name="Rectangle 8"/>
-          <p:cNvSpPr/>
-          <p:nvPr/>
-        </p:nvSpPr>
-        <p:spPr>
-          <a:xfrm>
-            <a:off x="5989320" y="1481328"/>
-            <a:ext cx="5440680" cy="1920240"/>
-          </a:xfrm>
-          <a:prstGeom prst="rect">
-            <a:avLst/>
-          </a:prstGeom>
-          <a:solidFill>
-            <a:srgbClr val="0F1E30"/>
-          </a:solidFill>
-          <a:ln w="19050">
-            <a:solidFill>
-              <a:srgbClr val="22D3EE"/>
-            </a:solidFill>
-          </a:ln>
-        </p:spPr>
-        <p:style>
-          <a:lnRef idx="1">
-            <a:schemeClr val="accent1"/>
-          </a:lnRef>
-          <a:fillRef idx="3">
-            <a:schemeClr val="accent1"/>
-          </a:fillRef>
-          <a:effectRef idx="2">
-            <a:schemeClr val="accent1"/>
-          </a:effectRef>
-          <a:fontRef idx="minor">
-            <a:schemeClr val="lt1"/>
-          </a:fontRef>
-        </p:style>
-        <p:txBody>
-          <a:bodyPr rtlCol="0" anchor="ctr"/>
-          <a:lstStyle/>
-          <a:p>
-            <a:pPr algn="ctr"/>
-          </a:p>
-        </p:txBody>
-      </p:sp>
-      <p:sp>
-        <p:nvSpPr>
-          <p:cNvPr id="10" name="TextBox 9"/>
-          <p:cNvSpPr txBox="1"/>
-          <p:nvPr/>
-        </p:nvSpPr>
-        <p:spPr>
-          <a:xfrm>
-            <a:off x="6153912" y="1591056"/>
-            <a:ext cx="5166360" cy="384048"/>
-          </a:xfrm>
-          <a:prstGeom prst="rect">
-            <a:avLst/>
-          </a:prstGeom>
-          <a:noFill/>
-        </p:spPr>
-        <p:txBody>
-          <a:bodyPr wrap="square">
-            <a:spAutoFit/>
-          </a:bodyPr>
-          <a:lstStyle/>
-          <a:p>
-            <a:pPr algn="l"/>
-            <a:r>
-              <a:rPr sz="1600" b="1" i="0">
-                <a:solidFill>
-                  <a:srgbClr val="22D3EE"/>
-                </a:solidFill>
-              </a:rPr>
-              <a:t>📊  LGB DA 57%가 최고</a:t>
-            </a:r>
-          </a:p>
-        </p:txBody>
-      </p:sp>
-      <p:sp>
-        <p:nvSpPr>
-          <p:cNvPr id="11" name="TextBox 10"/>
-          <p:cNvSpPr txBox="1"/>
-          <p:nvPr/>
-        </p:nvSpPr>
-        <p:spPr>
-          <a:xfrm>
-            <a:off x="6153912" y="2029968"/>
-            <a:ext cx="5166360" cy="1188720"/>
-          </a:xfrm>
-          <a:prstGeom prst="rect">
-            <a:avLst/>
-          </a:prstGeom>
-          <a:noFill/>
-        </p:spPr>
-        <p:txBody>
-          <a:bodyPr wrap="square">
-            <a:spAutoFit/>
-          </a:bodyPr>
-          <a:lstStyle/>
-          <a:p>
-            <a:pPr algn="l"/>
-            <a:r>
-              <a:rPr sz="1300" b="0" i="0">
-                <a:solidFill>
-                  <a:srgbClr val="94A3B8"/>
-                </a:solidFill>
-              </a:rPr>
-              <a:t>단일 모델 중 방향 정확도 최고 (57.3%)
-단, 이항검정 p-value로 유의성 별도 검증 필요</a:t>
-            </a:r>
-          </a:p>
-        </p:txBody>
-      </p:sp>
-      <p:sp>
-        <p:nvSpPr>
-          <p:cNvPr id="12" name="Rectangle 11"/>
-          <p:cNvSpPr/>
-          <p:nvPr/>
-        </p:nvSpPr>
-        <p:spPr>
-          <a:xfrm>
-            <a:off x="411480" y="3520440"/>
-            <a:ext cx="5440680" cy="1920240"/>
-          </a:xfrm>
-          <a:prstGeom prst="rect">
-            <a:avLst/>
-          </a:prstGeom>
-          <a:solidFill>
-            <a:srgbClr val="0F1E30"/>
-          </a:solidFill>
-          <a:ln w="19050">
-            <a:solidFill>
-              <a:srgbClr val="F59E0B"/>
-            </a:solidFill>
-          </a:ln>
-        </p:spPr>
-        <p:style>
-          <a:lnRef idx="1">
-            <a:schemeClr val="accent1"/>
-          </a:lnRef>
-          <a:fillRef idx="3">
-            <a:schemeClr val="accent1"/>
-          </a:fillRef>
-          <a:effectRef idx="2">
-            <a:schemeClr val="accent1"/>
-          </a:effectRef>
-          <a:fontRef idx="minor">
-            <a:schemeClr val="lt1"/>
-          </a:fontRef>
-        </p:style>
-        <p:txBody>
-          <a:bodyPr rtlCol="0" anchor="ctr"/>
-          <a:lstStyle/>
-          <a:p>
-            <a:pPr algn="ctr"/>
-          </a:p>
-        </p:txBody>
-      </p:sp>
-      <p:sp>
-        <p:nvSpPr>
-          <p:cNvPr id="13" name="TextBox 12"/>
-          <p:cNvSpPr txBox="1"/>
-          <p:nvPr/>
-        </p:nvSpPr>
-        <p:spPr>
-          <a:xfrm>
-            <a:off x="576072" y="3630168"/>
-            <a:ext cx="5166360" cy="384048"/>
-          </a:xfrm>
-          <a:prstGeom prst="rect">
-            <a:avLst/>
-          </a:prstGeom>
-          <a:noFill/>
-        </p:spPr>
-        <p:txBody>
-          <a:bodyPr wrap="square">
-            <a:spAutoFit/>
-          </a:bodyPr>
-          <a:lstStyle/>
-          <a:p>
-            <a:pPr algn="l"/>
-            <a:r>
-              <a:rPr sz="1600" b="1" i="0">
-                <a:solidFill>
-                  <a:srgbClr val="F59E0B"/>
-                </a:solidFill>
-              </a:rPr>
-              <a:t>🔗  멀티스케일 피처 효과</a:t>
-            </a:r>
-          </a:p>
-        </p:txBody>
-      </p:sp>
-      <p:sp>
-        <p:nvSpPr>
-          <p:cNvPr id="14" name="TextBox 13"/>
-          <p:cNvSpPr txBox="1"/>
-          <p:nvPr/>
-        </p:nvSpPr>
-        <p:spPr>
-          <a:xfrm>
-            <a:off x="576072" y="4069080"/>
-            <a:ext cx="5166360" cy="1188720"/>
-          </a:xfrm>
-          <a:prstGeom prst="rect">
-            <a:avLst/>
-          </a:prstGeom>
-          <a:noFill/>
-        </p:spPr>
-        <p:txBody>
-          <a:bodyPr wrap="square">
-            <a:spAutoFit/>
-          </a:bodyPr>
-          <a:lstStyle/>
-          <a:p>
-            <a:pPr algn="l"/>
-            <a:r>
-              <a:rPr sz="1300" b="0" i="0">
-                <a:solidFill>
-                  <a:srgbClr val="94A3B8"/>
-                </a:solidFill>
-              </a:rPr>
-              <a:t>분봉(1H·5M·1M) 통계를 일봉에 통합한 137개 피처
-장중 변동성 정보가 일봉 예측에 실질 기여</a:t>
-            </a:r>
-          </a:p>
-        </p:txBody>
-      </p:sp>
-      <p:sp>
-        <p:nvSpPr>
-          <p:cNvPr id="15" name="Rectangle 14"/>
-          <p:cNvSpPr/>
-          <p:nvPr/>
-        </p:nvSpPr>
-        <p:spPr>
-          <a:xfrm>
-            <a:off x="5989320" y="3520440"/>
-            <a:ext cx="5440680" cy="1920240"/>
-          </a:xfrm>
-          <a:prstGeom prst="rect">
-            <a:avLst/>
-          </a:prstGeom>
-          <a:solidFill>
-            <a:srgbClr val="0F1E30"/>
-          </a:solidFill>
-          <a:ln w="19050">
-            <a:solidFill>
-              <a:srgbClr val="A78BFA"/>
-            </a:solidFill>
-          </a:ln>
-        </p:spPr>
-        <p:style>
-          <a:lnRef idx="1">
-            <a:schemeClr val="accent1"/>
-          </a:lnRef>
-          <a:fillRef idx="3">
-            <a:schemeClr val="accent1"/>
-          </a:fillRef>
-          <a:effectRef idx="2">
-            <a:schemeClr val="accent1"/>
-          </a:effectRef>
-          <a:fontRef idx="minor">
-            <a:schemeClr val="lt1"/>
-          </a:fontRef>
-        </p:style>
-        <p:txBody>
-          <a:bodyPr rtlCol="0" anchor="ctr"/>
-          <a:lstStyle/>
-          <a:p>
-            <a:pPr algn="ctr"/>
-          </a:p>
-        </p:txBody>
-      </p:sp>
-      <p:sp>
-        <p:nvSpPr>
-          <p:cNvPr id="16" name="TextBox 15"/>
-          <p:cNvSpPr txBox="1"/>
-          <p:nvPr/>
-        </p:nvSpPr>
-        <p:spPr>
-          <a:xfrm>
-            <a:off x="6153912" y="3630168"/>
-            <a:ext cx="5166360" cy="384048"/>
-          </a:xfrm>
-          <a:prstGeom prst="rect">
-            <a:avLst/>
-          </a:prstGeom>
-          <a:noFill/>
-        </p:spPr>
-        <p:txBody>
-          <a:bodyPr wrap="square">
-            <a:spAutoFit/>
-          </a:bodyPr>
-          <a:lstStyle/>
-          <a:p>
-            <a:pPr algn="l"/>
-            <a:r>
-              <a:rPr sz="1600" b="1" i="0">
-                <a:solidFill>
-                  <a:srgbClr val="A78BFA"/>
-                </a:solidFill>
-              </a:rPr>
-              <a:t>🛡  Persistence 비교 필수</a:t>
-            </a:r>
-          </a:p>
-        </p:txBody>
-      </p:sp>
-      <p:sp>
-        <p:nvSpPr>
-          <p:cNvPr id="17" name="TextBox 16"/>
-          <p:cNvSpPr txBox="1"/>
-          <p:nvPr/>
-        </p:nvSpPr>
-        <p:spPr>
-          <a:xfrm>
-            <a:off x="6153912" y="4069080"/>
-            <a:ext cx="5166360" cy="1188720"/>
-          </a:xfrm>
-          <a:prstGeom prst="rect">
-            <a:avLst/>
-          </a:prstGeom>
-          <a:noFill/>
-        </p:spPr>
-        <p:txBody>
-          <a:bodyPr wrap="square">
-            <a:spAutoFit/>
-          </a:bodyPr>
-          <a:lstStyle/>
-          <a:p>
-            <a:pPr algn="l"/>
-            <a:r>
-              <a:rPr sz="1300" b="0" i="0">
-                <a:solidFill>
-                  <a:srgbClr val="94A3B8"/>
-                </a:solidFill>
-              </a:rPr>
-              <a:t>Persistence(기준선) RMSE 8.83원 → 앙상블 7.45원
-기준선 대비 15.6% 개선을 정량적으로 제시</a:t>
-            </a:r>
-          </a:p>
-        </p:txBody>
-      </p:sp>
-      <p:sp>
-        <p:nvSpPr>
-          <p:cNvPr id="18" name="Rectangle 17"/>
-          <p:cNvSpPr/>
-          <p:nvPr/>
-        </p:nvSpPr>
-        <p:spPr>
-          <a:xfrm>
-            <a:off x="411480" y="5577840"/>
-            <a:ext cx="11365992" cy="804672"/>
-          </a:xfrm>
-          <a:prstGeom prst="rect">
-            <a:avLst/>
-          </a:prstGeom>
-          <a:solidFill>
-            <a:srgbClr val="132740"/>
-          </a:solidFill>
-          <a:ln w="25400">
-            <a:solidFill>
-              <a:srgbClr val="22C55E"/>
-            </a:solidFill>
-          </a:ln>
-        </p:spPr>
-        <p:style>
-          <a:lnRef idx="1">
-            <a:schemeClr val="accent1"/>
-          </a:lnRef>
-          <a:fillRef idx="3">
-            <a:schemeClr val="accent1"/>
-          </a:fillRef>
-          <a:effectRef idx="2">
-            <a:schemeClr val="accent1"/>
-          </a:effectRef>
-          <a:fontRef idx="minor">
-            <a:schemeClr val="lt1"/>
-          </a:fontRef>
-        </p:style>
-        <p:txBody>
-          <a:bodyPr rtlCol="0" anchor="ctr"/>
-          <a:lstStyle/>
-          <a:p>
-            <a:pPr algn="ctr"/>
-          </a:p>
-        </p:txBody>
-      </p:sp>
-      <p:sp>
-        <p:nvSpPr>
-          <p:cNvPr id="19" name="TextBox 18"/>
-          <p:cNvSpPr txBox="1"/>
-          <p:nvPr/>
-        </p:nvSpPr>
-        <p:spPr>
-          <a:xfrm>
-            <a:off x="594360" y="5669280"/>
-            <a:ext cx="11000232" cy="594360"/>
-          </a:xfrm>
-          <a:prstGeom prst="rect">
-            <a:avLst/>
-          </a:prstGeom>
-          <a:noFill/>
-        </p:spPr>
-        <p:txBody>
-          <a:bodyPr wrap="square">
-            <a:spAutoFit/>
-          </a:bodyPr>
-          <a:lstStyle/>
-          <a:p>
-            <a:pPr algn="ctr"/>
-            <a:r>
-              <a:rPr sz="1400" b="1" i="0">
-                <a:solidFill>
-                  <a:srgbClr val="FFFFFF"/>
-                </a:solidFill>
-              </a:rPr>
-              <a:t>핵심 결론: 멀티스케일 피처 + 4모델 앙상블로 Persistence baseline 대비 15.6% RMSE 개선 — 단, Walk-Forward Validation으로 일반화 성능 추가 검증 필요</a:t>
+            <a:off x="411480" y="6583680"/>
+            <a:ext cx="11365992" cy="201168"/>
+          </a:xfrm>
+          <a:prstGeom prst="rect">
+            <a:avLst/>
+          </a:prstGeom>
+          <a:noFill/>
+        </p:spPr>
+        <p:txBody>
+          <a:bodyPr wrap="square">
+            <a:spAutoFit/>
+          </a:bodyPr>
+          <a:lstStyle/>
+          <a:p>
+            <a:pPr algn="ctr"/>
+            <a:r>
+              <a:rPr sz="900" b="0" i="1">
+                <a:solidFill>
+                  <a:srgbClr val="64748B"/>
+                </a:solidFill>
+              </a:rPr>
+              <a:t>※ 검증셋 통계 기반 시뮬레이션  |  실운영 시 collect_data() 로 실제 시장 데이터 사용</a:t>
             </a:r>
           </a:p>
         </p:txBody>
@@ -14673,7 +14197,7 @@
                   <a:srgbClr val="22C55E"/>
                 </a:solidFill>
               </a:rPr>
-              <a:t>D E P L O Y M E N T  ·  배 포   아 키 텍 처</a:t>
+              <a:t>K E Y   I N S I G H T S  ·  핵 심   인 사 이 트</a:t>
             </a:r>
           </a:p>
         </p:txBody>
@@ -14707,7 +14231,7 @@
                   <a:srgbClr val="FFFFFF"/>
                 </a:solidFill>
               </a:rPr>
-              <a:t>실시간 배포 아키텍처</a:t>
+              <a:t>핵심 인사이트</a:t>
             </a:r>
           </a:p>
         </p:txBody>
@@ -14763,1705 +14287,8 @@
         </p:nvSpPr>
         <p:spPr>
           <a:xfrm>
-            <a:off x="411480" y="1536192"/>
-            <a:ext cx="2057400" cy="2103120"/>
-          </a:xfrm>
-          <a:prstGeom prst="rect">
-            <a:avLst/>
-          </a:prstGeom>
-          <a:solidFill>
-            <a:srgbClr val="0F1E30"/>
-          </a:solidFill>
-          <a:ln w="25400">
-            <a:solidFill>
-              <a:srgbClr val="F59E0B"/>
-            </a:solidFill>
-          </a:ln>
-        </p:spPr>
-        <p:style>
-          <a:lnRef idx="1">
-            <a:schemeClr val="accent1"/>
-          </a:lnRef>
-          <a:fillRef idx="3">
-            <a:schemeClr val="accent1"/>
-          </a:fillRef>
-          <a:effectRef idx="2">
-            <a:schemeClr val="accent1"/>
-          </a:effectRef>
-          <a:fontRef idx="minor">
-            <a:schemeClr val="lt1"/>
-          </a:fontRef>
-        </p:style>
-        <p:txBody>
-          <a:bodyPr rtlCol="0" anchor="ctr"/>
-          <a:lstStyle/>
-          <a:p>
-            <a:pPr algn="ctr"/>
-          </a:p>
-        </p:txBody>
-      </p:sp>
-      <p:sp>
-        <p:nvSpPr>
-          <p:cNvPr id="7" name="TextBox 6"/>
-          <p:cNvSpPr txBox="1"/>
-          <p:nvPr/>
-        </p:nvSpPr>
-        <p:spPr>
-          <a:xfrm>
-            <a:off x="411480" y="1627632"/>
-            <a:ext cx="2057400" cy="548640"/>
-          </a:xfrm>
-          <a:prstGeom prst="rect">
-            <a:avLst/>
-          </a:prstGeom>
-          <a:noFill/>
-        </p:spPr>
-        <p:txBody>
-          <a:bodyPr wrap="square">
-            <a:spAutoFit/>
-          </a:bodyPr>
-          <a:lstStyle/>
-          <a:p>
-            <a:pPr algn="ctr"/>
-            <a:r>
-              <a:rPr sz="1600" b="1" i="0">
-                <a:solidFill>
-                  <a:srgbClr val="F59E0B"/>
-                </a:solidFill>
-              </a:rPr>
-              <a:t>Google
-Colab</a:t>
-            </a:r>
-          </a:p>
-        </p:txBody>
-      </p:sp>
-      <p:sp>
-        <p:nvSpPr>
-          <p:cNvPr id="8" name="TextBox 7"/>
-          <p:cNvSpPr txBox="1"/>
-          <p:nvPr/>
-        </p:nvSpPr>
-        <p:spPr>
-          <a:xfrm>
-            <a:off x="502920" y="2194560"/>
-            <a:ext cx="1892808" cy="1280160"/>
-          </a:xfrm>
-          <a:prstGeom prst="rect">
-            <a:avLst/>
-          </a:prstGeom>
-          <a:noFill/>
-        </p:spPr>
-        <p:txBody>
-          <a:bodyPr wrap="square">
-            <a:spAutoFit/>
-          </a:bodyPr>
-          <a:lstStyle/>
-          <a:p>
-            <a:pPr algn="ctr"/>
-            <a:r>
-              <a:rPr sz="1300" b="0" i="0">
-                <a:solidFill>
-                  <a:srgbClr val="94A3B8"/>
-                </a:solidFill>
-              </a:rPr>
-              <a:t>T4 GPU
-train.py
-주 1회</a:t>
-            </a:r>
-          </a:p>
-        </p:txBody>
-      </p:sp>
-      <p:sp>
-        <p:nvSpPr>
-          <p:cNvPr id="9" name="TextBox 8"/>
-          <p:cNvSpPr txBox="1"/>
-          <p:nvPr/>
-        </p:nvSpPr>
-        <p:spPr>
-          <a:xfrm>
-            <a:off x="2468880" y="2313432"/>
-            <a:ext cx="201168" cy="457200"/>
-          </a:xfrm>
-          <a:prstGeom prst="rect">
-            <a:avLst/>
-          </a:prstGeom>
-          <a:noFill/>
-        </p:spPr>
-        <p:txBody>
-          <a:bodyPr wrap="square">
-            <a:spAutoFit/>
-          </a:bodyPr>
-          <a:lstStyle/>
-          <a:p>
-            <a:pPr algn="l"/>
-            <a:r>
-              <a:rPr sz="2000" b="1" i="0">
-                <a:solidFill>
-                  <a:srgbClr val="64748B"/>
-                </a:solidFill>
-              </a:rPr>
-              <a:t>→</a:t>
-            </a:r>
-          </a:p>
-        </p:txBody>
-      </p:sp>
-      <p:sp>
-        <p:nvSpPr>
-          <p:cNvPr id="10" name="Rectangle 9"/>
-          <p:cNvSpPr/>
-          <p:nvPr/>
-        </p:nvSpPr>
-        <p:spPr>
-          <a:xfrm>
-            <a:off x="2679192" y="1536192"/>
-            <a:ext cx="2057400" cy="2103120"/>
-          </a:xfrm>
-          <a:prstGeom prst="rect">
-            <a:avLst/>
-          </a:prstGeom>
-          <a:solidFill>
-            <a:srgbClr val="0F1E30"/>
-          </a:solidFill>
-          <a:ln w="25400">
-            <a:solidFill>
-              <a:srgbClr val="22C55E"/>
-            </a:solidFill>
-          </a:ln>
-        </p:spPr>
-        <p:style>
-          <a:lnRef idx="1">
-            <a:schemeClr val="accent1"/>
-          </a:lnRef>
-          <a:fillRef idx="3">
-            <a:schemeClr val="accent1"/>
-          </a:fillRef>
-          <a:effectRef idx="2">
-            <a:schemeClr val="accent1"/>
-          </a:effectRef>
-          <a:fontRef idx="minor">
-            <a:schemeClr val="lt1"/>
-          </a:fontRef>
-        </p:style>
-        <p:txBody>
-          <a:bodyPr rtlCol="0" anchor="ctr"/>
-          <a:lstStyle/>
-          <a:p>
-            <a:pPr algn="ctr"/>
-          </a:p>
-        </p:txBody>
-      </p:sp>
-      <p:sp>
-        <p:nvSpPr>
-          <p:cNvPr id="11" name="TextBox 10"/>
-          <p:cNvSpPr txBox="1"/>
-          <p:nvPr/>
-        </p:nvSpPr>
-        <p:spPr>
-          <a:xfrm>
-            <a:off x="2679192" y="1627632"/>
-            <a:ext cx="2057400" cy="548640"/>
-          </a:xfrm>
-          <a:prstGeom prst="rect">
-            <a:avLst/>
-          </a:prstGeom>
-          <a:noFill/>
-        </p:spPr>
-        <p:txBody>
-          <a:bodyPr wrap="square">
-            <a:spAutoFit/>
-          </a:bodyPr>
-          <a:lstStyle/>
-          <a:p>
-            <a:pPr algn="ctr"/>
-            <a:r>
-              <a:rPr sz="1600" b="1" i="0">
-                <a:solidFill>
-                  <a:srgbClr val="22C55E"/>
-                </a:solidFill>
-              </a:rPr>
-              <a:t>GitHub
-(main)</a:t>
-            </a:r>
-          </a:p>
-        </p:txBody>
-      </p:sp>
-      <p:sp>
-        <p:nvSpPr>
-          <p:cNvPr id="12" name="TextBox 11"/>
-          <p:cNvSpPr txBox="1"/>
-          <p:nvPr/>
-        </p:nvSpPr>
-        <p:spPr>
-          <a:xfrm>
-            <a:off x="2770632" y="2194560"/>
-            <a:ext cx="1892808" cy="1280160"/>
-          </a:xfrm>
-          <a:prstGeom prst="rect">
-            <a:avLst/>
-          </a:prstGeom>
-          <a:noFill/>
-        </p:spPr>
-        <p:txBody>
-          <a:bodyPr wrap="square">
-            <a:spAutoFit/>
-          </a:bodyPr>
-          <a:lstStyle/>
-          <a:p>
-            <a:pPr algn="ctr"/>
-            <a:r>
-              <a:rPr sz="1300" b="0" i="0">
-                <a:solidFill>
-                  <a:srgbClr val="94A3B8"/>
-                </a:solidFill>
-              </a:rPr>
-              <a:t>모델 파일
-코드 관리
-Actions</a:t>
-            </a:r>
-          </a:p>
-        </p:txBody>
-      </p:sp>
-      <p:sp>
-        <p:nvSpPr>
-          <p:cNvPr id="13" name="TextBox 12"/>
-          <p:cNvSpPr txBox="1"/>
-          <p:nvPr/>
-        </p:nvSpPr>
-        <p:spPr>
-          <a:xfrm>
-            <a:off x="4736592" y="2313432"/>
-            <a:ext cx="201168" cy="457200"/>
-          </a:xfrm>
-          <a:prstGeom prst="rect">
-            <a:avLst/>
-          </a:prstGeom>
-          <a:noFill/>
-        </p:spPr>
-        <p:txBody>
-          <a:bodyPr wrap="square">
-            <a:spAutoFit/>
-          </a:bodyPr>
-          <a:lstStyle/>
-          <a:p>
-            <a:pPr algn="l"/>
-            <a:r>
-              <a:rPr sz="2000" b="1" i="0">
-                <a:solidFill>
-                  <a:srgbClr val="64748B"/>
-                </a:solidFill>
-              </a:rPr>
-              <a:t>→</a:t>
-            </a:r>
-          </a:p>
-        </p:txBody>
-      </p:sp>
-      <p:sp>
-        <p:nvSpPr>
-          <p:cNvPr id="14" name="Rectangle 13"/>
-          <p:cNvSpPr/>
-          <p:nvPr/>
-        </p:nvSpPr>
-        <p:spPr>
-          <a:xfrm>
-            <a:off x="4946904" y="1536192"/>
-            <a:ext cx="2057400" cy="2103120"/>
-          </a:xfrm>
-          <a:prstGeom prst="rect">
-            <a:avLst/>
-          </a:prstGeom>
-          <a:solidFill>
-            <a:srgbClr val="0F1E30"/>
-          </a:solidFill>
-          <a:ln w="25400">
-            <a:solidFill>
-              <a:srgbClr val="22D3EE"/>
-            </a:solidFill>
-          </a:ln>
-        </p:spPr>
-        <p:style>
-          <a:lnRef idx="1">
-            <a:schemeClr val="accent1"/>
-          </a:lnRef>
-          <a:fillRef idx="3">
-            <a:schemeClr val="accent1"/>
-          </a:fillRef>
-          <a:effectRef idx="2">
-            <a:schemeClr val="accent1"/>
-          </a:effectRef>
-          <a:fontRef idx="minor">
-            <a:schemeClr val="lt1"/>
-          </a:fontRef>
-        </p:style>
-        <p:txBody>
-          <a:bodyPr rtlCol="0" anchor="ctr"/>
-          <a:lstStyle/>
-          <a:p>
-            <a:pPr algn="ctr"/>
-          </a:p>
-        </p:txBody>
-      </p:sp>
-      <p:sp>
-        <p:nvSpPr>
-          <p:cNvPr id="15" name="TextBox 14"/>
-          <p:cNvSpPr txBox="1"/>
-          <p:nvPr/>
-        </p:nvSpPr>
-        <p:spPr>
-          <a:xfrm>
-            <a:off x="4946904" y="1627632"/>
-            <a:ext cx="2057400" cy="548640"/>
-          </a:xfrm>
-          <a:prstGeom prst="rect">
-            <a:avLst/>
-          </a:prstGeom>
-          <a:noFill/>
-        </p:spPr>
-        <p:txBody>
-          <a:bodyPr wrap="square">
-            <a:spAutoFit/>
-          </a:bodyPr>
-          <a:lstStyle/>
-          <a:p>
-            <a:pPr algn="ctr"/>
-            <a:r>
-              <a:rPr sz="1600" b="1" i="0">
-                <a:solidFill>
-                  <a:srgbClr val="22D3EE"/>
-                </a:solidFill>
-              </a:rPr>
-              <a:t>AWS S3</a:t>
-            </a:r>
-          </a:p>
-        </p:txBody>
-      </p:sp>
-      <p:sp>
-        <p:nvSpPr>
-          <p:cNvPr id="16" name="TextBox 15"/>
-          <p:cNvSpPr txBox="1"/>
-          <p:nvPr/>
-        </p:nvSpPr>
-        <p:spPr>
-          <a:xfrm>
-            <a:off x="5038344" y="2194560"/>
-            <a:ext cx="1892808" cy="1280160"/>
-          </a:xfrm>
-          <a:prstGeom prst="rect">
-            <a:avLst/>
-          </a:prstGeom>
-          <a:noFill/>
-        </p:spPr>
-        <p:txBody>
-          <a:bodyPr wrap="square">
-            <a:spAutoFit/>
-          </a:bodyPr>
-          <a:lstStyle/>
-          <a:p>
-            <a:pPr algn="ctr"/>
-            <a:r>
-              <a:rPr sz="1300" b="0" i="0">
-                <a:solidFill>
-                  <a:srgbClr val="94A3B8"/>
-                </a:solidFill>
-              </a:rPr>
-              <a:t>forecast.json
-residual.csv
-백업</a:t>
-            </a:r>
-          </a:p>
-        </p:txBody>
-      </p:sp>
-      <p:sp>
-        <p:nvSpPr>
-          <p:cNvPr id="17" name="TextBox 16"/>
-          <p:cNvSpPr txBox="1"/>
-          <p:nvPr/>
-        </p:nvSpPr>
-        <p:spPr>
-          <a:xfrm>
-            <a:off x="7004304" y="2313432"/>
-            <a:ext cx="201168" cy="457200"/>
-          </a:xfrm>
-          <a:prstGeom prst="rect">
-            <a:avLst/>
-          </a:prstGeom>
-          <a:noFill/>
-        </p:spPr>
-        <p:txBody>
-          <a:bodyPr wrap="square">
-            <a:spAutoFit/>
-          </a:bodyPr>
-          <a:lstStyle/>
-          <a:p>
-            <a:pPr algn="l"/>
-            <a:r>
-              <a:rPr sz="2000" b="1" i="0">
-                <a:solidFill>
-                  <a:srgbClr val="64748B"/>
-                </a:solidFill>
-              </a:rPr>
-              <a:t>→</a:t>
-            </a:r>
-          </a:p>
-        </p:txBody>
-      </p:sp>
-      <p:sp>
-        <p:nvSpPr>
-          <p:cNvPr id="18" name="Rectangle 17"/>
-          <p:cNvSpPr/>
-          <p:nvPr/>
-        </p:nvSpPr>
-        <p:spPr>
-          <a:xfrm>
-            <a:off x="7214616" y="1536192"/>
-            <a:ext cx="2057400" cy="2103120"/>
-          </a:xfrm>
-          <a:prstGeom prst="rect">
-            <a:avLst/>
-          </a:prstGeom>
-          <a:solidFill>
-            <a:srgbClr val="0F1E30"/>
-          </a:solidFill>
-          <a:ln w="25400">
-            <a:solidFill>
-              <a:srgbClr val="A78BFA"/>
-            </a:solidFill>
-          </a:ln>
-        </p:spPr>
-        <p:style>
-          <a:lnRef idx="1">
-            <a:schemeClr val="accent1"/>
-          </a:lnRef>
-          <a:fillRef idx="3">
-            <a:schemeClr val="accent1"/>
-          </a:fillRef>
-          <a:effectRef idx="2">
-            <a:schemeClr val="accent1"/>
-          </a:effectRef>
-          <a:fontRef idx="minor">
-            <a:schemeClr val="lt1"/>
-          </a:fontRef>
-        </p:style>
-        <p:txBody>
-          <a:bodyPr rtlCol="0" anchor="ctr"/>
-          <a:lstStyle/>
-          <a:p>
-            <a:pPr algn="ctr"/>
-          </a:p>
-        </p:txBody>
-      </p:sp>
-      <p:sp>
-        <p:nvSpPr>
-          <p:cNvPr id="19" name="TextBox 18"/>
-          <p:cNvSpPr txBox="1"/>
-          <p:nvPr/>
-        </p:nvSpPr>
-        <p:spPr>
-          <a:xfrm>
-            <a:off x="7214616" y="1627632"/>
-            <a:ext cx="2057400" cy="548640"/>
-          </a:xfrm>
-          <a:prstGeom prst="rect">
-            <a:avLst/>
-          </a:prstGeom>
-          <a:noFill/>
-        </p:spPr>
-        <p:txBody>
-          <a:bodyPr wrap="square">
-            <a:spAutoFit/>
-          </a:bodyPr>
-          <a:lstStyle/>
-          <a:p>
-            <a:pPr algn="ctr"/>
-            <a:r>
-              <a:rPr sz="1600" b="1" i="0">
-                <a:solidFill>
-                  <a:srgbClr val="A78BFA"/>
-                </a:solidFill>
-              </a:rPr>
-              <a:t>EC2/Lambda</a:t>
-            </a:r>
-          </a:p>
-        </p:txBody>
-      </p:sp>
-      <p:sp>
-        <p:nvSpPr>
-          <p:cNvPr id="20" name="TextBox 19"/>
-          <p:cNvSpPr txBox="1"/>
-          <p:nvPr/>
-        </p:nvSpPr>
-        <p:spPr>
-          <a:xfrm>
-            <a:off x="7306056" y="2194560"/>
-            <a:ext cx="1892808" cy="1280160"/>
-          </a:xfrm>
-          <a:prstGeom prst="rect">
-            <a:avLst/>
-          </a:prstGeom>
-          <a:noFill/>
-        </p:spPr>
-        <p:txBody>
-          <a:bodyPr wrap="square">
-            <a:spAutoFit/>
-          </a:bodyPr>
-          <a:lstStyle/>
-          <a:p>
-            <a:pPr algn="ctr"/>
-            <a:r>
-              <a:rPr sz="1300" b="0" i="0">
-                <a:solidFill>
-                  <a:srgbClr val="94A3B8"/>
-                </a:solidFill>
-              </a:rPr>
-              <a:t>KST 06:00
-predict.py
-잔차수집</a:t>
-            </a:r>
-          </a:p>
-        </p:txBody>
-      </p:sp>
-      <p:sp>
-        <p:nvSpPr>
-          <p:cNvPr id="21" name="TextBox 20"/>
-          <p:cNvSpPr txBox="1"/>
-          <p:nvPr/>
-        </p:nvSpPr>
-        <p:spPr>
-          <a:xfrm>
-            <a:off x="9272016" y="2313432"/>
-            <a:ext cx="201168" cy="457200"/>
-          </a:xfrm>
-          <a:prstGeom prst="rect">
-            <a:avLst/>
-          </a:prstGeom>
-          <a:noFill/>
-        </p:spPr>
-        <p:txBody>
-          <a:bodyPr wrap="square">
-            <a:spAutoFit/>
-          </a:bodyPr>
-          <a:lstStyle/>
-          <a:p>
-            <a:pPr algn="l"/>
-            <a:r>
-              <a:rPr sz="2000" b="1" i="0">
-                <a:solidFill>
-                  <a:srgbClr val="64748B"/>
-                </a:solidFill>
-              </a:rPr>
-              <a:t>→</a:t>
-            </a:r>
-          </a:p>
-        </p:txBody>
-      </p:sp>
-      <p:sp>
-        <p:nvSpPr>
-          <p:cNvPr id="22" name="Rectangle 21"/>
-          <p:cNvSpPr/>
-          <p:nvPr/>
-        </p:nvSpPr>
-        <p:spPr>
-          <a:xfrm>
-            <a:off x="9482328" y="1536192"/>
-            <a:ext cx="2057400" cy="2103120"/>
-          </a:xfrm>
-          <a:prstGeom prst="rect">
-            <a:avLst/>
-          </a:prstGeom>
-          <a:solidFill>
-            <a:srgbClr val="0F1E30"/>
-          </a:solidFill>
-          <a:ln w="25400">
-            <a:solidFill>
-              <a:srgbClr val="EF4444"/>
-            </a:solidFill>
-          </a:ln>
-        </p:spPr>
-        <p:style>
-          <a:lnRef idx="1">
-            <a:schemeClr val="accent1"/>
-          </a:lnRef>
-          <a:fillRef idx="3">
-            <a:schemeClr val="accent1"/>
-          </a:fillRef>
-          <a:effectRef idx="2">
-            <a:schemeClr val="accent1"/>
-          </a:effectRef>
-          <a:fontRef idx="minor">
-            <a:schemeClr val="lt1"/>
-          </a:fontRef>
-        </p:style>
-        <p:txBody>
-          <a:bodyPr rtlCol="0" anchor="ctr"/>
-          <a:lstStyle/>
-          <a:p>
-            <a:pPr algn="ctr"/>
-          </a:p>
-        </p:txBody>
-      </p:sp>
-      <p:sp>
-        <p:nvSpPr>
-          <p:cNvPr id="23" name="TextBox 22"/>
-          <p:cNvSpPr txBox="1"/>
-          <p:nvPr/>
-        </p:nvSpPr>
-        <p:spPr>
-          <a:xfrm>
-            <a:off x="9482328" y="1627632"/>
-            <a:ext cx="2057400" cy="548640"/>
-          </a:xfrm>
-          <a:prstGeom prst="rect">
-            <a:avLst/>
-          </a:prstGeom>
-          <a:noFill/>
-        </p:spPr>
-        <p:txBody>
-          <a:bodyPr wrap="square">
-            <a:spAutoFit/>
-          </a:bodyPr>
-          <a:lstStyle/>
-          <a:p>
-            <a:pPr algn="ctr"/>
-            <a:r>
-              <a:rPr sz="1600" b="1" i="0">
-                <a:solidFill>
-                  <a:srgbClr val="EF4444"/>
-                </a:solidFill>
-              </a:rPr>
-              <a:t>Streamlit
-Cloud</a:t>
-            </a:r>
-          </a:p>
-        </p:txBody>
-      </p:sp>
-      <p:sp>
-        <p:nvSpPr>
-          <p:cNvPr id="24" name="TextBox 23"/>
-          <p:cNvSpPr txBox="1"/>
-          <p:nvPr/>
-        </p:nvSpPr>
-        <p:spPr>
-          <a:xfrm>
-            <a:off x="9573768" y="2194560"/>
-            <a:ext cx="1892808" cy="1280160"/>
-          </a:xfrm>
-          <a:prstGeom prst="rect">
-            <a:avLst/>
-          </a:prstGeom>
-          <a:noFill/>
-        </p:spPr>
-        <p:txBody>
-          <a:bodyPr wrap="square">
-            <a:spAutoFit/>
-          </a:bodyPr>
-          <a:lstStyle/>
-          <a:p>
-            <a:pPr algn="ctr"/>
-            <a:r>
-              <a:rPr sz="1300" b="0" i="0">
-                <a:solidFill>
-                  <a:srgbClr val="94A3B8"/>
-                </a:solidFill>
-              </a:rPr>
-              <a:t>실시간 차트
-LGB 추론
-5분 캐시</a:t>
-            </a:r>
-          </a:p>
-        </p:txBody>
-      </p:sp>
-      <p:sp>
-        <p:nvSpPr>
-          <p:cNvPr id="25" name="Rectangle 24"/>
-          <p:cNvSpPr/>
-          <p:nvPr/>
-        </p:nvSpPr>
-        <p:spPr>
-          <a:xfrm>
-            <a:off x="411480" y="3822191"/>
-            <a:ext cx="11365992" cy="2743200"/>
-          </a:xfrm>
-          <a:prstGeom prst="rect">
-            <a:avLst/>
-          </a:prstGeom>
-          <a:solidFill>
-            <a:srgbClr val="0F1E30"/>
-          </a:solidFill>
-          <a:ln w="12700">
-            <a:solidFill>
-              <a:srgbClr val="64748B"/>
-            </a:solidFill>
-          </a:ln>
-        </p:spPr>
-        <p:style>
-          <a:lnRef idx="1">
-            <a:schemeClr val="accent1"/>
-          </a:lnRef>
-          <a:fillRef idx="3">
-            <a:schemeClr val="accent1"/>
-          </a:fillRef>
-          <a:effectRef idx="2">
-            <a:schemeClr val="accent1"/>
-          </a:effectRef>
-          <a:fontRef idx="minor">
-            <a:schemeClr val="lt1"/>
-          </a:fontRef>
-        </p:style>
-        <p:txBody>
-          <a:bodyPr rtlCol="0" anchor="ctr"/>
-          <a:lstStyle/>
-          <a:p>
-            <a:pPr algn="ctr"/>
-          </a:p>
-        </p:txBody>
-      </p:sp>
-      <p:sp>
-        <p:nvSpPr>
-          <p:cNvPr id="26" name="TextBox 25"/>
-          <p:cNvSpPr txBox="1"/>
-          <p:nvPr/>
-        </p:nvSpPr>
-        <p:spPr>
-          <a:xfrm>
-            <a:off x="594360" y="3913632"/>
-            <a:ext cx="7315200" cy="347472"/>
-          </a:xfrm>
-          <a:prstGeom prst="rect">
-            <a:avLst/>
-          </a:prstGeom>
-          <a:noFill/>
-        </p:spPr>
-        <p:txBody>
-          <a:bodyPr wrap="square">
-            <a:spAutoFit/>
-          </a:bodyPr>
-          <a:lstStyle/>
-          <a:p>
-            <a:pPr algn="l"/>
-            <a:r>
-              <a:rPr sz="1400" b="1" i="0">
-                <a:solidFill>
-                  <a:srgbClr val="22C55E"/>
-                </a:solidFill>
-              </a:rPr>
-              <a:t>colab_master.ipynb — 8셀 자동화</a:t>
-            </a:r>
-          </a:p>
-        </p:txBody>
-      </p:sp>
-      <p:sp>
-        <p:nvSpPr>
-          <p:cNvPr id="27" name="Rectangle 26"/>
-          <p:cNvSpPr/>
-          <p:nvPr/>
-        </p:nvSpPr>
-        <p:spPr>
-          <a:xfrm>
-            <a:off x="502920" y="4315968"/>
-            <a:ext cx="1371600" cy="685800"/>
-          </a:xfrm>
-          <a:prstGeom prst="rect">
-            <a:avLst/>
-          </a:prstGeom>
-          <a:solidFill>
-            <a:srgbClr val="132740"/>
-          </a:solidFill>
-          <a:ln w="12700">
-            <a:solidFill>
-              <a:srgbClr val="F59E0B"/>
-            </a:solidFill>
-          </a:ln>
-        </p:spPr>
-        <p:style>
-          <a:lnRef idx="1">
-            <a:schemeClr val="accent1"/>
-          </a:lnRef>
-          <a:fillRef idx="3">
-            <a:schemeClr val="accent1"/>
-          </a:fillRef>
-          <a:effectRef idx="2">
-            <a:schemeClr val="accent1"/>
-          </a:effectRef>
-          <a:fontRef idx="minor">
-            <a:schemeClr val="lt1"/>
-          </a:fontRef>
-        </p:style>
-        <p:txBody>
-          <a:bodyPr rtlCol="0" anchor="ctr"/>
-          <a:lstStyle/>
-          <a:p>
-            <a:pPr algn="ctr"/>
-          </a:p>
-        </p:txBody>
-      </p:sp>
-      <p:sp>
-        <p:nvSpPr>
-          <p:cNvPr id="28" name="TextBox 27"/>
-          <p:cNvSpPr txBox="1"/>
-          <p:nvPr/>
-        </p:nvSpPr>
-        <p:spPr>
-          <a:xfrm>
-            <a:off x="576072" y="4370832"/>
-            <a:ext cx="457200" cy="274320"/>
-          </a:xfrm>
-          <a:prstGeom prst="rect">
-            <a:avLst/>
-          </a:prstGeom>
-          <a:noFill/>
-        </p:spPr>
-        <p:txBody>
-          <a:bodyPr wrap="square">
-            <a:spAutoFit/>
-          </a:bodyPr>
-          <a:lstStyle/>
-          <a:p>
-            <a:pPr algn="l"/>
-            <a:r>
-              <a:rPr sz="1200" b="1" i="0">
-                <a:solidFill>
-                  <a:srgbClr val="F59E0B"/>
-                </a:solidFill>
-              </a:rPr>
-              <a:t>셀 1</a:t>
-            </a:r>
-          </a:p>
-        </p:txBody>
-      </p:sp>
-      <p:sp>
-        <p:nvSpPr>
-          <p:cNvPr id="29" name="TextBox 28"/>
-          <p:cNvSpPr txBox="1"/>
-          <p:nvPr/>
-        </p:nvSpPr>
-        <p:spPr>
-          <a:xfrm>
-            <a:off x="576072" y="4645152"/>
-            <a:ext cx="1243584" cy="274320"/>
-          </a:xfrm>
-          <a:prstGeom prst="rect">
-            <a:avLst/>
-          </a:prstGeom>
-          <a:noFill/>
-        </p:spPr>
-        <p:txBody>
-          <a:bodyPr wrap="square">
-            <a:spAutoFit/>
-          </a:bodyPr>
-          <a:lstStyle/>
-          <a:p>
-            <a:pPr algn="l"/>
-            <a:r>
-              <a:rPr sz="1100" b="0" i="0">
-                <a:solidFill>
-                  <a:srgbClr val="FFFFFF"/>
-                </a:solidFill>
-              </a:rPr>
-              <a:t>GitHub Secrets</a:t>
-            </a:r>
-          </a:p>
-        </p:txBody>
-      </p:sp>
-      <p:sp>
-        <p:nvSpPr>
-          <p:cNvPr id="30" name="Rectangle 29"/>
-          <p:cNvSpPr/>
-          <p:nvPr/>
-        </p:nvSpPr>
-        <p:spPr>
-          <a:xfrm>
-            <a:off x="1984248" y="4315968"/>
-            <a:ext cx="1371600" cy="685800"/>
-          </a:xfrm>
-          <a:prstGeom prst="rect">
-            <a:avLst/>
-          </a:prstGeom>
-          <a:solidFill>
-            <a:srgbClr val="132740"/>
-          </a:solidFill>
-          <a:ln w="12700">
-            <a:solidFill>
-              <a:srgbClr val="94A3B8"/>
-            </a:solidFill>
-          </a:ln>
-        </p:spPr>
-        <p:style>
-          <a:lnRef idx="1">
-            <a:schemeClr val="accent1"/>
-          </a:lnRef>
-          <a:fillRef idx="3">
-            <a:schemeClr val="accent1"/>
-          </a:fillRef>
-          <a:effectRef idx="2">
-            <a:schemeClr val="accent1"/>
-          </a:effectRef>
-          <a:fontRef idx="minor">
-            <a:schemeClr val="lt1"/>
-          </a:fontRef>
-        </p:style>
-        <p:txBody>
-          <a:bodyPr rtlCol="0" anchor="ctr"/>
-          <a:lstStyle/>
-          <a:p>
-            <a:pPr algn="ctr"/>
-          </a:p>
-        </p:txBody>
-      </p:sp>
-      <p:sp>
-        <p:nvSpPr>
-          <p:cNvPr id="31" name="TextBox 30"/>
-          <p:cNvSpPr txBox="1"/>
-          <p:nvPr/>
-        </p:nvSpPr>
-        <p:spPr>
-          <a:xfrm>
-            <a:off x="2057400" y="4370832"/>
-            <a:ext cx="457200" cy="274320"/>
-          </a:xfrm>
-          <a:prstGeom prst="rect">
-            <a:avLst/>
-          </a:prstGeom>
-          <a:noFill/>
-        </p:spPr>
-        <p:txBody>
-          <a:bodyPr wrap="square">
-            <a:spAutoFit/>
-          </a:bodyPr>
-          <a:lstStyle/>
-          <a:p>
-            <a:pPr algn="l"/>
-            <a:r>
-              <a:rPr sz="1200" b="1" i="0">
-                <a:solidFill>
-                  <a:srgbClr val="94A3B8"/>
-                </a:solidFill>
-              </a:rPr>
-              <a:t>셀 2</a:t>
-            </a:r>
-          </a:p>
-        </p:txBody>
-      </p:sp>
-      <p:sp>
-        <p:nvSpPr>
-          <p:cNvPr id="32" name="TextBox 31"/>
-          <p:cNvSpPr txBox="1"/>
-          <p:nvPr/>
-        </p:nvSpPr>
-        <p:spPr>
-          <a:xfrm>
-            <a:off x="2057400" y="4645152"/>
-            <a:ext cx="1243584" cy="274320"/>
-          </a:xfrm>
-          <a:prstGeom prst="rect">
-            <a:avLst/>
-          </a:prstGeom>
-          <a:noFill/>
-        </p:spPr>
-        <p:txBody>
-          <a:bodyPr wrap="square">
-            <a:spAutoFit/>
-          </a:bodyPr>
-          <a:lstStyle/>
-          <a:p>
-            <a:pPr algn="l"/>
-            <a:r>
-              <a:rPr sz="1100" b="0" i="0">
-                <a:solidFill>
-                  <a:srgbClr val="FFFFFF"/>
-                </a:solidFill>
-              </a:rPr>
-              <a:t>Drive + 클론</a:t>
-            </a:r>
-          </a:p>
-        </p:txBody>
-      </p:sp>
-      <p:sp>
-        <p:nvSpPr>
-          <p:cNvPr id="33" name="Rectangle 32"/>
-          <p:cNvSpPr/>
-          <p:nvPr/>
-        </p:nvSpPr>
-        <p:spPr>
-          <a:xfrm>
-            <a:off x="3465576" y="4315968"/>
-            <a:ext cx="1371600" cy="685800"/>
-          </a:xfrm>
-          <a:prstGeom prst="rect">
-            <a:avLst/>
-          </a:prstGeom>
-          <a:solidFill>
-            <a:srgbClr val="132740"/>
-          </a:solidFill>
-          <a:ln w="12700">
-            <a:solidFill>
-              <a:srgbClr val="94A3B8"/>
-            </a:solidFill>
-          </a:ln>
-        </p:spPr>
-        <p:style>
-          <a:lnRef idx="1">
-            <a:schemeClr val="accent1"/>
-          </a:lnRef>
-          <a:fillRef idx="3">
-            <a:schemeClr val="accent1"/>
-          </a:fillRef>
-          <a:effectRef idx="2">
-            <a:schemeClr val="accent1"/>
-          </a:effectRef>
-          <a:fontRef idx="minor">
-            <a:schemeClr val="lt1"/>
-          </a:fontRef>
-        </p:style>
-        <p:txBody>
-          <a:bodyPr rtlCol="0" anchor="ctr"/>
-          <a:lstStyle/>
-          <a:p>
-            <a:pPr algn="ctr"/>
-          </a:p>
-        </p:txBody>
-      </p:sp>
-      <p:sp>
-        <p:nvSpPr>
-          <p:cNvPr id="34" name="TextBox 33"/>
-          <p:cNvSpPr txBox="1"/>
-          <p:nvPr/>
-        </p:nvSpPr>
-        <p:spPr>
-          <a:xfrm>
-            <a:off x="3538728" y="4370832"/>
-            <a:ext cx="457200" cy="274320"/>
-          </a:xfrm>
-          <a:prstGeom prst="rect">
-            <a:avLst/>
-          </a:prstGeom>
-          <a:noFill/>
-        </p:spPr>
-        <p:txBody>
-          <a:bodyPr wrap="square">
-            <a:spAutoFit/>
-          </a:bodyPr>
-          <a:lstStyle/>
-          <a:p>
-            <a:pPr algn="l"/>
-            <a:r>
-              <a:rPr sz="1200" b="1" i="0">
-                <a:solidFill>
-                  <a:srgbClr val="94A3B8"/>
-                </a:solidFill>
-              </a:rPr>
-              <a:t>셀 3</a:t>
-            </a:r>
-          </a:p>
-        </p:txBody>
-      </p:sp>
-      <p:sp>
-        <p:nvSpPr>
-          <p:cNvPr id="35" name="TextBox 34"/>
-          <p:cNvSpPr txBox="1"/>
-          <p:nvPr/>
-        </p:nvSpPr>
-        <p:spPr>
-          <a:xfrm>
-            <a:off x="3538728" y="4645152"/>
-            <a:ext cx="1243584" cy="274320"/>
-          </a:xfrm>
-          <a:prstGeom prst="rect">
-            <a:avLst/>
-          </a:prstGeom>
-          <a:noFill/>
-        </p:spPr>
-        <p:txBody>
-          <a:bodyPr wrap="square">
-            <a:spAutoFit/>
-          </a:bodyPr>
-          <a:lstStyle/>
-          <a:p>
-            <a:pPr algn="l"/>
-            <a:r>
-              <a:rPr sz="1100" b="0" i="0">
-                <a:solidFill>
-                  <a:srgbClr val="FFFFFF"/>
-                </a:solidFill>
-              </a:rPr>
-              <a:t>패키지 설치</a:t>
-            </a:r>
-          </a:p>
-        </p:txBody>
-      </p:sp>
-      <p:sp>
-        <p:nvSpPr>
-          <p:cNvPr id="36" name="Rectangle 35"/>
-          <p:cNvSpPr/>
-          <p:nvPr/>
-        </p:nvSpPr>
-        <p:spPr>
-          <a:xfrm>
-            <a:off x="4946904" y="4315968"/>
-            <a:ext cx="1371600" cy="685800"/>
-          </a:xfrm>
-          <a:prstGeom prst="rect">
-            <a:avLst/>
-          </a:prstGeom>
-          <a:solidFill>
-            <a:srgbClr val="132740"/>
-          </a:solidFill>
-          <a:ln w="12700">
-            <a:solidFill>
-              <a:srgbClr val="94A3B8"/>
-            </a:solidFill>
-          </a:ln>
-        </p:spPr>
-        <p:style>
-          <a:lnRef idx="1">
-            <a:schemeClr val="accent1"/>
-          </a:lnRef>
-          <a:fillRef idx="3">
-            <a:schemeClr val="accent1"/>
-          </a:fillRef>
-          <a:effectRef idx="2">
-            <a:schemeClr val="accent1"/>
-          </a:effectRef>
-          <a:fontRef idx="minor">
-            <a:schemeClr val="lt1"/>
-          </a:fontRef>
-        </p:style>
-        <p:txBody>
-          <a:bodyPr rtlCol="0" anchor="ctr"/>
-          <a:lstStyle/>
-          <a:p>
-            <a:pPr algn="ctr"/>
-          </a:p>
-        </p:txBody>
-      </p:sp>
-      <p:sp>
-        <p:nvSpPr>
-          <p:cNvPr id="37" name="TextBox 36"/>
-          <p:cNvSpPr txBox="1"/>
-          <p:nvPr/>
-        </p:nvSpPr>
-        <p:spPr>
-          <a:xfrm>
-            <a:off x="5020056" y="4370832"/>
-            <a:ext cx="457200" cy="274320"/>
-          </a:xfrm>
-          <a:prstGeom prst="rect">
-            <a:avLst/>
-          </a:prstGeom>
-          <a:noFill/>
-        </p:spPr>
-        <p:txBody>
-          <a:bodyPr wrap="square">
-            <a:spAutoFit/>
-          </a:bodyPr>
-          <a:lstStyle/>
-          <a:p>
-            <a:pPr algn="l"/>
-            <a:r>
-              <a:rPr sz="1200" b="1" i="0">
-                <a:solidFill>
-                  <a:srgbClr val="94A3B8"/>
-                </a:solidFill>
-              </a:rPr>
-              <a:t>셀 4</a:t>
-            </a:r>
-          </a:p>
-        </p:txBody>
-      </p:sp>
-      <p:sp>
-        <p:nvSpPr>
-          <p:cNvPr id="38" name="TextBox 37"/>
-          <p:cNvSpPr txBox="1"/>
-          <p:nvPr/>
-        </p:nvSpPr>
-        <p:spPr>
-          <a:xfrm>
-            <a:off x="5020056" y="4645152"/>
-            <a:ext cx="1243584" cy="274320"/>
-          </a:xfrm>
-          <a:prstGeom prst="rect">
-            <a:avLst/>
-          </a:prstGeom>
-          <a:noFill/>
-        </p:spPr>
-        <p:txBody>
-          <a:bodyPr wrap="square">
-            <a:spAutoFit/>
-          </a:bodyPr>
-          <a:lstStyle/>
-          <a:p>
-            <a:pPr algn="l"/>
-            <a:r>
-              <a:rPr sz="1100" b="0" i="0">
-                <a:solidFill>
-                  <a:srgbClr val="FFFFFF"/>
-                </a:solidFill>
-              </a:rPr>
-              <a:t>git pull</a:t>
-            </a:r>
-          </a:p>
-        </p:txBody>
-      </p:sp>
-      <p:sp>
-        <p:nvSpPr>
-          <p:cNvPr id="39" name="Rectangle 38"/>
-          <p:cNvSpPr/>
-          <p:nvPr/>
-        </p:nvSpPr>
-        <p:spPr>
-          <a:xfrm>
-            <a:off x="502920" y="5074920"/>
-            <a:ext cx="1371600" cy="685800"/>
-          </a:xfrm>
-          <a:prstGeom prst="rect">
-            <a:avLst/>
-          </a:prstGeom>
-          <a:solidFill>
-            <a:srgbClr val="132740"/>
-          </a:solidFill>
-          <a:ln w="12700">
-            <a:solidFill>
-              <a:srgbClr val="22C55E"/>
-            </a:solidFill>
-          </a:ln>
-        </p:spPr>
-        <p:style>
-          <a:lnRef idx="1">
-            <a:schemeClr val="accent1"/>
-          </a:lnRef>
-          <a:fillRef idx="3">
-            <a:schemeClr val="accent1"/>
-          </a:fillRef>
-          <a:effectRef idx="2">
-            <a:schemeClr val="accent1"/>
-          </a:effectRef>
-          <a:fontRef idx="minor">
-            <a:schemeClr val="lt1"/>
-          </a:fontRef>
-        </p:style>
-        <p:txBody>
-          <a:bodyPr rtlCol="0" anchor="ctr"/>
-          <a:lstStyle/>
-          <a:p>
-            <a:pPr algn="ctr"/>
-          </a:p>
-        </p:txBody>
-      </p:sp>
-      <p:sp>
-        <p:nvSpPr>
-          <p:cNvPr id="40" name="TextBox 39"/>
-          <p:cNvSpPr txBox="1"/>
-          <p:nvPr/>
-        </p:nvSpPr>
-        <p:spPr>
-          <a:xfrm>
-            <a:off x="576072" y="5129784"/>
-            <a:ext cx="457200" cy="274320"/>
-          </a:xfrm>
-          <a:prstGeom prst="rect">
-            <a:avLst/>
-          </a:prstGeom>
-          <a:noFill/>
-        </p:spPr>
-        <p:txBody>
-          <a:bodyPr wrap="square">
-            <a:spAutoFit/>
-          </a:bodyPr>
-          <a:lstStyle/>
-          <a:p>
-            <a:pPr algn="l"/>
-            <a:r>
-              <a:rPr sz="1200" b="1" i="0">
-                <a:solidFill>
-                  <a:srgbClr val="22C55E"/>
-                </a:solidFill>
-              </a:rPr>
-              <a:t>셀 5</a:t>
-            </a:r>
-          </a:p>
-        </p:txBody>
-      </p:sp>
-      <p:sp>
-        <p:nvSpPr>
-          <p:cNvPr id="41" name="TextBox 40"/>
-          <p:cNvSpPr txBox="1"/>
-          <p:nvPr/>
-        </p:nvSpPr>
-        <p:spPr>
-          <a:xfrm>
-            <a:off x="576072" y="5404104"/>
-            <a:ext cx="1243584" cy="274320"/>
-          </a:xfrm>
-          <a:prstGeom prst="rect">
-            <a:avLst/>
-          </a:prstGeom>
-          <a:noFill/>
-        </p:spPr>
-        <p:txBody>
-          <a:bodyPr wrap="square">
-            <a:spAutoFit/>
-          </a:bodyPr>
-          <a:lstStyle/>
-          <a:p>
-            <a:pPr algn="l"/>
-            <a:r>
-              <a:rPr sz="1100" b="0" i="0">
-                <a:solidFill>
-                  <a:srgbClr val="FFFFFF"/>
-                </a:solidFill>
-              </a:rPr>
-              <a:t>train/predict</a:t>
-            </a:r>
-          </a:p>
-        </p:txBody>
-      </p:sp>
-      <p:sp>
-        <p:nvSpPr>
-          <p:cNvPr id="42" name="Rectangle 41"/>
-          <p:cNvSpPr/>
-          <p:nvPr/>
-        </p:nvSpPr>
-        <p:spPr>
-          <a:xfrm>
-            <a:off x="1984248" y="5074920"/>
-            <a:ext cx="1371600" cy="685800"/>
-          </a:xfrm>
-          <a:prstGeom prst="rect">
-            <a:avLst/>
-          </a:prstGeom>
-          <a:solidFill>
-            <a:srgbClr val="132740"/>
-          </a:solidFill>
-          <a:ln w="12700">
-            <a:solidFill>
-              <a:srgbClr val="64748B"/>
-            </a:solidFill>
-          </a:ln>
-        </p:spPr>
-        <p:style>
-          <a:lnRef idx="1">
-            <a:schemeClr val="accent1"/>
-          </a:lnRef>
-          <a:fillRef idx="3">
-            <a:schemeClr val="accent1"/>
-          </a:fillRef>
-          <a:effectRef idx="2">
-            <a:schemeClr val="accent1"/>
-          </a:effectRef>
-          <a:fontRef idx="minor">
-            <a:schemeClr val="lt1"/>
-          </a:fontRef>
-        </p:style>
-        <p:txBody>
-          <a:bodyPr rtlCol="0" anchor="ctr"/>
-          <a:lstStyle/>
-          <a:p>
-            <a:pPr algn="ctr"/>
-          </a:p>
-        </p:txBody>
-      </p:sp>
-      <p:sp>
-        <p:nvSpPr>
-          <p:cNvPr id="43" name="TextBox 42"/>
-          <p:cNvSpPr txBox="1"/>
-          <p:nvPr/>
-        </p:nvSpPr>
-        <p:spPr>
-          <a:xfrm>
-            <a:off x="2057400" y="5129784"/>
-            <a:ext cx="457200" cy="274320"/>
-          </a:xfrm>
-          <a:prstGeom prst="rect">
-            <a:avLst/>
-          </a:prstGeom>
-          <a:noFill/>
-        </p:spPr>
-        <p:txBody>
-          <a:bodyPr wrap="square">
-            <a:spAutoFit/>
-          </a:bodyPr>
-          <a:lstStyle/>
-          <a:p>
-            <a:pPr algn="l"/>
-            <a:r>
-              <a:rPr sz="1200" b="1" i="0">
-                <a:solidFill>
-                  <a:srgbClr val="64748B"/>
-                </a:solidFill>
-              </a:rPr>
-              <a:t>셀 6</a:t>
-            </a:r>
-          </a:p>
-        </p:txBody>
-      </p:sp>
-      <p:sp>
-        <p:nvSpPr>
-          <p:cNvPr id="44" name="TextBox 43"/>
-          <p:cNvSpPr txBox="1"/>
-          <p:nvPr/>
-        </p:nvSpPr>
-        <p:spPr>
-          <a:xfrm>
-            <a:off x="2057400" y="5404104"/>
-            <a:ext cx="1243584" cy="274320"/>
-          </a:xfrm>
-          <a:prstGeom prst="rect">
-            <a:avLst/>
-          </a:prstGeom>
-          <a:noFill/>
-        </p:spPr>
-        <p:txBody>
-          <a:bodyPr wrap="square">
-            <a:spAutoFit/>
-          </a:bodyPr>
-          <a:lstStyle/>
-          <a:p>
-            <a:pPr algn="l"/>
-            <a:r>
-              <a:rPr sz="1100" b="0" i="0">
-                <a:solidFill>
-                  <a:srgbClr val="FFFFFF"/>
-                </a:solidFill>
-              </a:rPr>
-              <a:t>로컬 테스트</a:t>
-            </a:r>
-          </a:p>
-        </p:txBody>
-      </p:sp>
-      <p:sp>
-        <p:nvSpPr>
-          <p:cNvPr id="45" name="Rectangle 44"/>
-          <p:cNvSpPr/>
-          <p:nvPr/>
-        </p:nvSpPr>
-        <p:spPr>
-          <a:xfrm>
-            <a:off x="3465576" y="5074920"/>
-            <a:ext cx="1371600" cy="685800"/>
-          </a:xfrm>
-          <a:prstGeom prst="rect">
-            <a:avLst/>
-          </a:prstGeom>
-          <a:solidFill>
-            <a:srgbClr val="132740"/>
-          </a:solidFill>
-          <a:ln w="12700">
-            <a:solidFill>
-              <a:srgbClr val="22D3EE"/>
-            </a:solidFill>
-          </a:ln>
-        </p:spPr>
-        <p:style>
-          <a:lnRef idx="1">
-            <a:schemeClr val="accent1"/>
-          </a:lnRef>
-          <a:fillRef idx="3">
-            <a:schemeClr val="accent1"/>
-          </a:fillRef>
-          <a:effectRef idx="2">
-            <a:schemeClr val="accent1"/>
-          </a:effectRef>
-          <a:fontRef idx="minor">
-            <a:schemeClr val="lt1"/>
-          </a:fontRef>
-        </p:style>
-        <p:txBody>
-          <a:bodyPr rtlCol="0" anchor="ctr"/>
-          <a:lstStyle/>
-          <a:p>
-            <a:pPr algn="ctr"/>
-          </a:p>
-        </p:txBody>
-      </p:sp>
-      <p:sp>
-        <p:nvSpPr>
-          <p:cNvPr id="46" name="TextBox 45"/>
-          <p:cNvSpPr txBox="1"/>
-          <p:nvPr/>
-        </p:nvSpPr>
-        <p:spPr>
-          <a:xfrm>
-            <a:off x="3538728" y="5129784"/>
-            <a:ext cx="457200" cy="274320"/>
-          </a:xfrm>
-          <a:prstGeom prst="rect">
-            <a:avLst/>
-          </a:prstGeom>
-          <a:noFill/>
-        </p:spPr>
-        <p:txBody>
-          <a:bodyPr wrap="square">
-            <a:spAutoFit/>
-          </a:bodyPr>
-          <a:lstStyle/>
-          <a:p>
-            <a:pPr algn="l"/>
-            <a:r>
-              <a:rPr sz="1200" b="1" i="0">
-                <a:solidFill>
-                  <a:srgbClr val="22D3EE"/>
-                </a:solidFill>
-              </a:rPr>
-              <a:t>셀 7</a:t>
-            </a:r>
-          </a:p>
-        </p:txBody>
-      </p:sp>
-      <p:sp>
-        <p:nvSpPr>
-          <p:cNvPr id="47" name="TextBox 46"/>
-          <p:cNvSpPr txBox="1"/>
-          <p:nvPr/>
-        </p:nvSpPr>
-        <p:spPr>
-          <a:xfrm>
-            <a:off x="3538728" y="5404104"/>
-            <a:ext cx="1243584" cy="274320"/>
-          </a:xfrm>
-          <a:prstGeom prst="rect">
-            <a:avLst/>
-          </a:prstGeom>
-          <a:noFill/>
-        </p:spPr>
-        <p:txBody>
-          <a:bodyPr wrap="square">
-            <a:spAutoFit/>
-          </a:bodyPr>
-          <a:lstStyle/>
-          <a:p>
-            <a:pPr algn="l"/>
-            <a:r>
-              <a:rPr sz="1100" b="0" i="0">
-                <a:solidFill>
-                  <a:srgbClr val="FFFFFF"/>
-                </a:solidFill>
-              </a:rPr>
-              <a:t>git push</a:t>
-            </a:r>
-          </a:p>
-        </p:txBody>
-      </p:sp>
-      <p:sp>
-        <p:nvSpPr>
-          <p:cNvPr id="48" name="Rectangle 47"/>
-          <p:cNvSpPr/>
-          <p:nvPr/>
-        </p:nvSpPr>
-        <p:spPr>
-          <a:xfrm>
-            <a:off x="4946904" y="5074920"/>
-            <a:ext cx="1371600" cy="685800"/>
-          </a:xfrm>
-          <a:prstGeom prst="rect">
-            <a:avLst/>
-          </a:prstGeom>
-          <a:solidFill>
-            <a:srgbClr val="132740"/>
-          </a:solidFill>
-          <a:ln w="12700">
-            <a:solidFill>
-              <a:srgbClr val="F59E0B"/>
-            </a:solidFill>
-          </a:ln>
-        </p:spPr>
-        <p:style>
-          <a:lnRef idx="1">
-            <a:schemeClr val="accent1"/>
-          </a:lnRef>
-          <a:fillRef idx="3">
-            <a:schemeClr val="accent1"/>
-          </a:fillRef>
-          <a:effectRef idx="2">
-            <a:schemeClr val="accent1"/>
-          </a:effectRef>
-          <a:fontRef idx="minor">
-            <a:schemeClr val="lt1"/>
-          </a:fontRef>
-        </p:style>
-        <p:txBody>
-          <a:bodyPr rtlCol="0" anchor="ctr"/>
-          <a:lstStyle/>
-          <a:p>
-            <a:pPr algn="ctr"/>
-          </a:p>
-        </p:txBody>
-      </p:sp>
-      <p:sp>
-        <p:nvSpPr>
-          <p:cNvPr id="49" name="TextBox 48"/>
-          <p:cNvSpPr txBox="1"/>
-          <p:nvPr/>
-        </p:nvSpPr>
-        <p:spPr>
-          <a:xfrm>
-            <a:off x="5020056" y="5129784"/>
-            <a:ext cx="457200" cy="274320"/>
-          </a:xfrm>
-          <a:prstGeom prst="rect">
-            <a:avLst/>
-          </a:prstGeom>
-          <a:noFill/>
-        </p:spPr>
-        <p:txBody>
-          <a:bodyPr wrap="square">
-            <a:spAutoFit/>
-          </a:bodyPr>
-          <a:lstStyle/>
-          <a:p>
-            <a:pPr algn="l"/>
-            <a:r>
-              <a:rPr sz="1200" b="1" i="0">
-                <a:solidFill>
-                  <a:srgbClr val="F59E0B"/>
-                </a:solidFill>
-              </a:rPr>
-              <a:t>셀 8</a:t>
-            </a:r>
-          </a:p>
-        </p:txBody>
-      </p:sp>
-      <p:sp>
-        <p:nvSpPr>
-          <p:cNvPr id="50" name="TextBox 49"/>
-          <p:cNvSpPr txBox="1"/>
-          <p:nvPr/>
-        </p:nvSpPr>
-        <p:spPr>
-          <a:xfrm>
-            <a:off x="5020056" y="5404104"/>
-            <a:ext cx="1243584" cy="274320"/>
-          </a:xfrm>
-          <a:prstGeom prst="rect">
-            <a:avLst/>
-          </a:prstGeom>
-          <a:noFill/>
-        </p:spPr>
-        <p:txBody>
-          <a:bodyPr wrap="square">
-            <a:spAutoFit/>
-          </a:bodyPr>
-          <a:lstStyle/>
-          <a:p>
-            <a:pPr algn="l"/>
-            <a:r>
-              <a:rPr sz="1100" b="0" i="0">
-                <a:solidFill>
-                  <a:srgbClr val="FFFFFF"/>
-                </a:solidFill>
-              </a:rPr>
-              <a:t>KST 06:00 자동</a:t>
-            </a:r>
-          </a:p>
-        </p:txBody>
-      </p:sp>
-      <p:sp>
-        <p:nvSpPr>
-          <p:cNvPr id="51" name="Rectangle 50"/>
-          <p:cNvSpPr/>
-          <p:nvPr/>
-        </p:nvSpPr>
-        <p:spPr>
-          <a:xfrm>
-            <a:off x="6400800" y="3822191"/>
-            <a:ext cx="5577840" cy="2743200"/>
+            <a:off x="411480" y="1481328"/>
+            <a:ext cx="5440680" cy="1920240"/>
           </a:xfrm>
           <a:prstGeom prst="rect">
             <a:avLst/>
@@ -16499,14 +14326,14 @@
       </p:sp>
       <p:sp>
         <p:nvSpPr>
-          <p:cNvPr id="52" name="TextBox 51"/>
-          <p:cNvSpPr txBox="1"/>
-          <p:nvPr/>
-        </p:nvSpPr>
-        <p:spPr>
-          <a:xfrm>
-            <a:off x="6583680" y="3913632"/>
-            <a:ext cx="5303520" cy="347472"/>
+          <p:cNvPr id="7" name="TextBox 6"/>
+          <p:cNvSpPr txBox="1"/>
+          <p:nvPr/>
+        </p:nvSpPr>
+        <p:spPr>
+          <a:xfrm>
+            <a:off x="576072" y="1591056"/>
+            <a:ext cx="5166360" cy="384048"/>
           </a:xfrm>
           <a:prstGeom prst="rect">
             <a:avLst/>
@@ -16521,284 +14348,468 @@
           <a:p>
             <a:pPr algn="l"/>
             <a:r>
+              <a:rPr sz="1600" b="1" i="0">
+                <a:solidFill>
+                  <a:srgbClr val="22C55E"/>
+                </a:solidFill>
+              </a:rPr>
+              <a:t>⚡  앙상블이 RMSE 최소</a:t>
+            </a:r>
+          </a:p>
+        </p:txBody>
+      </p:sp>
+      <p:sp>
+        <p:nvSpPr>
+          <p:cNvPr id="8" name="TextBox 7"/>
+          <p:cNvSpPr txBox="1"/>
+          <p:nvPr/>
+        </p:nvSpPr>
+        <p:spPr>
+          <a:xfrm>
+            <a:off x="576072" y="2029968"/>
+            <a:ext cx="5166360" cy="1188720"/>
+          </a:xfrm>
+          <a:prstGeom prst="rect">
+            <a:avLst/>
+          </a:prstGeom>
+          <a:noFill/>
+        </p:spPr>
+        <p:txBody>
+          <a:bodyPr wrap="square">
+            <a:spAutoFit/>
+          </a:bodyPr>
+          <a:lstStyle/>
+          <a:p>
+            <a:pPr algn="l"/>
+            <a:r>
+              <a:rPr sz="1300" b="0" i="0">
+                <a:solidFill>
+                  <a:srgbClr val="94A3B8"/>
+                </a:solidFill>
+              </a:rPr>
+              <a:t>Ridge 앙상블 7.45원 — 단일 LGB(7.85원) 대비 5% 개선
+LSTM의 Sharpe 기여를 흡수해 최적 결합</a:t>
+            </a:r>
+          </a:p>
+        </p:txBody>
+      </p:sp>
+      <p:sp>
+        <p:nvSpPr>
+          <p:cNvPr id="9" name="Rectangle 8"/>
+          <p:cNvSpPr/>
+          <p:nvPr/>
+        </p:nvSpPr>
+        <p:spPr>
+          <a:xfrm>
+            <a:off x="5989320" y="1481328"/>
+            <a:ext cx="5440680" cy="1920240"/>
+          </a:xfrm>
+          <a:prstGeom prst="rect">
+            <a:avLst/>
+          </a:prstGeom>
+          <a:solidFill>
+            <a:srgbClr val="0F1E30"/>
+          </a:solidFill>
+          <a:ln w="19050">
+            <a:solidFill>
+              <a:srgbClr val="22D3EE"/>
+            </a:solidFill>
+          </a:ln>
+        </p:spPr>
+        <p:style>
+          <a:lnRef idx="1">
+            <a:schemeClr val="accent1"/>
+          </a:lnRef>
+          <a:fillRef idx="3">
+            <a:schemeClr val="accent1"/>
+          </a:fillRef>
+          <a:effectRef idx="2">
+            <a:schemeClr val="accent1"/>
+          </a:effectRef>
+          <a:fontRef idx="minor">
+            <a:schemeClr val="lt1"/>
+          </a:fontRef>
+        </p:style>
+        <p:txBody>
+          <a:bodyPr rtlCol="0" anchor="ctr"/>
+          <a:lstStyle/>
+          <a:p>
+            <a:pPr algn="ctr"/>
+          </a:p>
+        </p:txBody>
+      </p:sp>
+      <p:sp>
+        <p:nvSpPr>
+          <p:cNvPr id="10" name="TextBox 9"/>
+          <p:cNvSpPr txBox="1"/>
+          <p:nvPr/>
+        </p:nvSpPr>
+        <p:spPr>
+          <a:xfrm>
+            <a:off x="6153912" y="1591056"/>
+            <a:ext cx="5166360" cy="384048"/>
+          </a:xfrm>
+          <a:prstGeom prst="rect">
+            <a:avLst/>
+          </a:prstGeom>
+          <a:noFill/>
+        </p:spPr>
+        <p:txBody>
+          <a:bodyPr wrap="square">
+            <a:spAutoFit/>
+          </a:bodyPr>
+          <a:lstStyle/>
+          <a:p>
+            <a:pPr algn="l"/>
+            <a:r>
+              <a:rPr sz="1600" b="1" i="0">
+                <a:solidFill>
+                  <a:srgbClr val="22D3EE"/>
+                </a:solidFill>
+              </a:rPr>
+              <a:t>📊  LGB DA 57%가 최고</a:t>
+            </a:r>
+          </a:p>
+        </p:txBody>
+      </p:sp>
+      <p:sp>
+        <p:nvSpPr>
+          <p:cNvPr id="11" name="TextBox 10"/>
+          <p:cNvSpPr txBox="1"/>
+          <p:nvPr/>
+        </p:nvSpPr>
+        <p:spPr>
+          <a:xfrm>
+            <a:off x="6153912" y="2029968"/>
+            <a:ext cx="5166360" cy="1188720"/>
+          </a:xfrm>
+          <a:prstGeom prst="rect">
+            <a:avLst/>
+          </a:prstGeom>
+          <a:noFill/>
+        </p:spPr>
+        <p:txBody>
+          <a:bodyPr wrap="square">
+            <a:spAutoFit/>
+          </a:bodyPr>
+          <a:lstStyle/>
+          <a:p>
+            <a:pPr algn="l"/>
+            <a:r>
+              <a:rPr sz="1300" b="0" i="0">
+                <a:solidFill>
+                  <a:srgbClr val="94A3B8"/>
+                </a:solidFill>
+              </a:rPr>
+              <a:t>단일 모델 중 방향 정확도 최고 (57.3%)
+단, 이항검정 p-value로 유의성 별도 검증 필요</a:t>
+            </a:r>
+          </a:p>
+        </p:txBody>
+      </p:sp>
+      <p:sp>
+        <p:nvSpPr>
+          <p:cNvPr id="12" name="Rectangle 11"/>
+          <p:cNvSpPr/>
+          <p:nvPr/>
+        </p:nvSpPr>
+        <p:spPr>
+          <a:xfrm>
+            <a:off x="411480" y="3520440"/>
+            <a:ext cx="5440680" cy="1920240"/>
+          </a:xfrm>
+          <a:prstGeom prst="rect">
+            <a:avLst/>
+          </a:prstGeom>
+          <a:solidFill>
+            <a:srgbClr val="0F1E30"/>
+          </a:solidFill>
+          <a:ln w="19050">
+            <a:solidFill>
+              <a:srgbClr val="F59E0B"/>
+            </a:solidFill>
+          </a:ln>
+        </p:spPr>
+        <p:style>
+          <a:lnRef idx="1">
+            <a:schemeClr val="accent1"/>
+          </a:lnRef>
+          <a:fillRef idx="3">
+            <a:schemeClr val="accent1"/>
+          </a:fillRef>
+          <a:effectRef idx="2">
+            <a:schemeClr val="accent1"/>
+          </a:effectRef>
+          <a:fontRef idx="minor">
+            <a:schemeClr val="lt1"/>
+          </a:fontRef>
+        </p:style>
+        <p:txBody>
+          <a:bodyPr rtlCol="0" anchor="ctr"/>
+          <a:lstStyle/>
+          <a:p>
+            <a:pPr algn="ctr"/>
+          </a:p>
+        </p:txBody>
+      </p:sp>
+      <p:sp>
+        <p:nvSpPr>
+          <p:cNvPr id="13" name="TextBox 12"/>
+          <p:cNvSpPr txBox="1"/>
+          <p:nvPr/>
+        </p:nvSpPr>
+        <p:spPr>
+          <a:xfrm>
+            <a:off x="576072" y="3630168"/>
+            <a:ext cx="5166360" cy="384048"/>
+          </a:xfrm>
+          <a:prstGeom prst="rect">
+            <a:avLst/>
+          </a:prstGeom>
+          <a:noFill/>
+        </p:spPr>
+        <p:txBody>
+          <a:bodyPr wrap="square">
+            <a:spAutoFit/>
+          </a:bodyPr>
+          <a:lstStyle/>
+          <a:p>
+            <a:pPr algn="l"/>
+            <a:r>
+              <a:rPr sz="1600" b="1" i="0">
+                <a:solidFill>
+                  <a:srgbClr val="F59E0B"/>
+                </a:solidFill>
+              </a:rPr>
+              <a:t>🔗  멀티스케일 피처 효과</a:t>
+            </a:r>
+          </a:p>
+        </p:txBody>
+      </p:sp>
+      <p:sp>
+        <p:nvSpPr>
+          <p:cNvPr id="14" name="TextBox 13"/>
+          <p:cNvSpPr txBox="1"/>
+          <p:nvPr/>
+        </p:nvSpPr>
+        <p:spPr>
+          <a:xfrm>
+            <a:off x="576072" y="4069080"/>
+            <a:ext cx="5166360" cy="1188720"/>
+          </a:xfrm>
+          <a:prstGeom prst="rect">
+            <a:avLst/>
+          </a:prstGeom>
+          <a:noFill/>
+        </p:spPr>
+        <p:txBody>
+          <a:bodyPr wrap="square">
+            <a:spAutoFit/>
+          </a:bodyPr>
+          <a:lstStyle/>
+          <a:p>
+            <a:pPr algn="l"/>
+            <a:r>
+              <a:rPr sz="1300" b="0" i="0">
+                <a:solidFill>
+                  <a:srgbClr val="94A3B8"/>
+                </a:solidFill>
+              </a:rPr>
+              <a:t>분봉(1H·5M·1M) 통계를 일봉에 통합한 137개 피처
+장중 변동성 정보가 일봉 예측에 실질 기여</a:t>
+            </a:r>
+          </a:p>
+        </p:txBody>
+      </p:sp>
+      <p:sp>
+        <p:nvSpPr>
+          <p:cNvPr id="15" name="Rectangle 14"/>
+          <p:cNvSpPr/>
+          <p:nvPr/>
+        </p:nvSpPr>
+        <p:spPr>
+          <a:xfrm>
+            <a:off x="5989320" y="3520440"/>
+            <a:ext cx="5440680" cy="1920240"/>
+          </a:xfrm>
+          <a:prstGeom prst="rect">
+            <a:avLst/>
+          </a:prstGeom>
+          <a:solidFill>
+            <a:srgbClr val="0F1E30"/>
+          </a:solidFill>
+          <a:ln w="19050">
+            <a:solidFill>
+              <a:srgbClr val="A78BFA"/>
+            </a:solidFill>
+          </a:ln>
+        </p:spPr>
+        <p:style>
+          <a:lnRef idx="1">
+            <a:schemeClr val="accent1"/>
+          </a:lnRef>
+          <a:fillRef idx="3">
+            <a:schemeClr val="accent1"/>
+          </a:fillRef>
+          <a:effectRef idx="2">
+            <a:schemeClr val="accent1"/>
+          </a:effectRef>
+          <a:fontRef idx="minor">
+            <a:schemeClr val="lt1"/>
+          </a:fontRef>
+        </p:style>
+        <p:txBody>
+          <a:bodyPr rtlCol="0" anchor="ctr"/>
+          <a:lstStyle/>
+          <a:p>
+            <a:pPr algn="ctr"/>
+          </a:p>
+        </p:txBody>
+      </p:sp>
+      <p:sp>
+        <p:nvSpPr>
+          <p:cNvPr id="16" name="TextBox 15"/>
+          <p:cNvSpPr txBox="1"/>
+          <p:nvPr/>
+        </p:nvSpPr>
+        <p:spPr>
+          <a:xfrm>
+            <a:off x="6153912" y="3630168"/>
+            <a:ext cx="5166360" cy="384048"/>
+          </a:xfrm>
+          <a:prstGeom prst="rect">
+            <a:avLst/>
+          </a:prstGeom>
+          <a:noFill/>
+        </p:spPr>
+        <p:txBody>
+          <a:bodyPr wrap="square">
+            <a:spAutoFit/>
+          </a:bodyPr>
+          <a:lstStyle/>
+          <a:p>
+            <a:pPr algn="l"/>
+            <a:r>
+              <a:rPr sz="1600" b="1" i="0">
+                <a:solidFill>
+                  <a:srgbClr val="A78BFA"/>
+                </a:solidFill>
+              </a:rPr>
+              <a:t>🛡  Persistence 비교 필수</a:t>
+            </a:r>
+          </a:p>
+        </p:txBody>
+      </p:sp>
+      <p:sp>
+        <p:nvSpPr>
+          <p:cNvPr id="17" name="TextBox 16"/>
+          <p:cNvSpPr txBox="1"/>
+          <p:nvPr/>
+        </p:nvSpPr>
+        <p:spPr>
+          <a:xfrm>
+            <a:off x="6153912" y="4069080"/>
+            <a:ext cx="5166360" cy="1188720"/>
+          </a:xfrm>
+          <a:prstGeom prst="rect">
+            <a:avLst/>
+          </a:prstGeom>
+          <a:noFill/>
+        </p:spPr>
+        <p:txBody>
+          <a:bodyPr wrap="square">
+            <a:spAutoFit/>
+          </a:bodyPr>
+          <a:lstStyle/>
+          <a:p>
+            <a:pPr algn="l"/>
+            <a:r>
+              <a:rPr sz="1300" b="0" i="0">
+                <a:solidFill>
+                  <a:srgbClr val="94A3B8"/>
+                </a:solidFill>
+              </a:rPr>
+              <a:t>Persistence(기준선) RMSE 8.83원 → 앙상블 7.45원
+기준선 대비 15.6% 개선을 정량적으로 제시</a:t>
+            </a:r>
+          </a:p>
+        </p:txBody>
+      </p:sp>
+      <p:sp>
+        <p:nvSpPr>
+          <p:cNvPr id="18" name="Rectangle 17"/>
+          <p:cNvSpPr/>
+          <p:nvPr/>
+        </p:nvSpPr>
+        <p:spPr>
+          <a:xfrm>
+            <a:off x="411480" y="5577840"/>
+            <a:ext cx="11365992" cy="804672"/>
+          </a:xfrm>
+          <a:prstGeom prst="rect">
+            <a:avLst/>
+          </a:prstGeom>
+          <a:solidFill>
+            <a:srgbClr val="132740"/>
+          </a:solidFill>
+          <a:ln w="25400">
+            <a:solidFill>
+              <a:srgbClr val="22C55E"/>
+            </a:solidFill>
+          </a:ln>
+        </p:spPr>
+        <p:style>
+          <a:lnRef idx="1">
+            <a:schemeClr val="accent1"/>
+          </a:lnRef>
+          <a:fillRef idx="3">
+            <a:schemeClr val="accent1"/>
+          </a:fillRef>
+          <a:effectRef idx="2">
+            <a:schemeClr val="accent1"/>
+          </a:effectRef>
+          <a:fontRef idx="minor">
+            <a:schemeClr val="lt1"/>
+          </a:fontRef>
+        </p:style>
+        <p:txBody>
+          <a:bodyPr rtlCol="0" anchor="ctr"/>
+          <a:lstStyle/>
+          <a:p>
+            <a:pPr algn="ctr"/>
+          </a:p>
+        </p:txBody>
+      </p:sp>
+      <p:sp>
+        <p:nvSpPr>
+          <p:cNvPr id="19" name="TextBox 18"/>
+          <p:cNvSpPr txBox="1"/>
+          <p:nvPr/>
+        </p:nvSpPr>
+        <p:spPr>
+          <a:xfrm>
+            <a:off x="594360" y="5669280"/>
+            <a:ext cx="11000232" cy="594360"/>
+          </a:xfrm>
+          <a:prstGeom prst="rect">
+            <a:avLst/>
+          </a:prstGeom>
+          <a:noFill/>
+        </p:spPr>
+        <p:txBody>
+          <a:bodyPr wrap="square">
+            <a:spAutoFit/>
+          </a:bodyPr>
+          <a:lstStyle/>
+          <a:p>
+            <a:pPr algn="ctr"/>
+            <a:r>
               <a:rPr sz="1400" b="1" i="0">
                 <a:solidFill>
-                  <a:srgbClr val="22C55E"/>
-                </a:solidFill>
-              </a:rPr>
-              <a:t>Streamlit 대시보드 기능</a:t>
-            </a:r>
-          </a:p>
-        </p:txBody>
-      </p:sp>
-      <p:sp>
-        <p:nvSpPr>
-          <p:cNvPr id="53" name="TextBox 52"/>
-          <p:cNvSpPr txBox="1"/>
-          <p:nvPr/>
-        </p:nvSpPr>
-        <p:spPr>
-          <a:xfrm>
-            <a:off x="6583680" y="4343400"/>
-            <a:ext cx="731520" cy="292608"/>
-          </a:xfrm>
-          <a:prstGeom prst="rect">
-            <a:avLst/>
-          </a:prstGeom>
-          <a:noFill/>
-        </p:spPr>
-        <p:txBody>
-          <a:bodyPr wrap="square">
-            <a:spAutoFit/>
-          </a:bodyPr>
-          <a:lstStyle/>
-          <a:p>
-            <a:pPr algn="l"/>
-            <a:r>
-              <a:rPr sz="1200" b="1" i="0">
-                <a:solidFill>
-                  <a:srgbClr val="22C55E"/>
-                </a:solidFill>
-              </a:rPr>
-              <a:t>▸  TAB 1</a:t>
-            </a:r>
-          </a:p>
-        </p:txBody>
-      </p:sp>
-      <p:sp>
-        <p:nvSpPr>
-          <p:cNvPr id="54" name="TextBox 53"/>
-          <p:cNvSpPr txBox="1"/>
-          <p:nvPr/>
-        </p:nvSpPr>
-        <p:spPr>
-          <a:xfrm>
-            <a:off x="7360920" y="4343400"/>
-            <a:ext cx="4480560" cy="292608"/>
-          </a:xfrm>
-          <a:prstGeom prst="rect">
-            <a:avLst/>
-          </a:prstGeom>
-          <a:noFill/>
-        </p:spPr>
-        <p:txBody>
-          <a:bodyPr wrap="square">
-            <a:spAutoFit/>
-          </a:bodyPr>
-          <a:lstStyle/>
-          <a:p>
-            <a:pPr algn="l"/>
-            <a:r>
-              <a:rPr sz="1200" b="0" i="0">
-                <a:solidFill>
-                  <a:srgbClr val="94A3B8"/>
-                </a:solidFill>
-              </a:rPr>
-              <a:t>실시간 환율 차트 + 5분 자동 갱신</a:t>
-            </a:r>
-          </a:p>
-        </p:txBody>
-      </p:sp>
-      <p:sp>
-        <p:nvSpPr>
-          <p:cNvPr id="55" name="TextBox 54"/>
-          <p:cNvSpPr txBox="1"/>
-          <p:nvPr/>
-        </p:nvSpPr>
-        <p:spPr>
-          <a:xfrm>
-            <a:off x="6583680" y="4727448"/>
-            <a:ext cx="731520" cy="292608"/>
-          </a:xfrm>
-          <a:prstGeom prst="rect">
-            <a:avLst/>
-          </a:prstGeom>
-          <a:noFill/>
-        </p:spPr>
-        <p:txBody>
-          <a:bodyPr wrap="square">
-            <a:spAutoFit/>
-          </a:bodyPr>
-          <a:lstStyle/>
-          <a:p>
-            <a:pPr algn="l"/>
-            <a:r>
-              <a:rPr sz="1200" b="1" i="0">
-                <a:solidFill>
-                  <a:srgbClr val="22D3EE"/>
-                </a:solidFill>
-              </a:rPr>
-              <a:t>▸  TAB 2</a:t>
-            </a:r>
-          </a:p>
-        </p:txBody>
-      </p:sp>
-      <p:sp>
-        <p:nvSpPr>
-          <p:cNvPr id="56" name="TextBox 55"/>
-          <p:cNvSpPr txBox="1"/>
-          <p:nvPr/>
-        </p:nvSpPr>
-        <p:spPr>
-          <a:xfrm>
-            <a:off x="7360920" y="4727448"/>
-            <a:ext cx="4480560" cy="292608"/>
-          </a:xfrm>
-          <a:prstGeom prst="rect">
-            <a:avLst/>
-          </a:prstGeom>
-          <a:noFill/>
-        </p:spPr>
-        <p:txBody>
-          <a:bodyPr wrap="square">
-            <a:spAutoFit/>
-          </a:bodyPr>
-          <a:lstStyle/>
-          <a:p>
-            <a:pPr algn="l"/>
-            <a:r>
-              <a:rPr sz="1200" b="0" i="0">
-                <a:solidFill>
-                  <a:srgbClr val="94A3B8"/>
-                </a:solidFill>
-              </a:rPr>
-              <a:t>D+1~D+22 예측 (LGB 실시간 추론)</a:t>
-            </a:r>
-          </a:p>
-        </p:txBody>
-      </p:sp>
-      <p:sp>
-        <p:nvSpPr>
-          <p:cNvPr id="57" name="TextBox 56"/>
-          <p:cNvSpPr txBox="1"/>
-          <p:nvPr/>
-        </p:nvSpPr>
-        <p:spPr>
-          <a:xfrm>
-            <a:off x="6583680" y="5111496"/>
-            <a:ext cx="731520" cy="292608"/>
-          </a:xfrm>
-          <a:prstGeom prst="rect">
-            <a:avLst/>
-          </a:prstGeom>
-          <a:noFill/>
-        </p:spPr>
-        <p:txBody>
-          <a:bodyPr wrap="square">
-            <a:spAutoFit/>
-          </a:bodyPr>
-          <a:lstStyle/>
-          <a:p>
-            <a:pPr algn="l"/>
-            <a:r>
-              <a:rPr sz="1200" b="1" i="0">
-                <a:solidFill>
-                  <a:srgbClr val="F59E0B"/>
-                </a:solidFill>
-              </a:rPr>
-              <a:t>▸  TAB 3</a:t>
-            </a:r>
-          </a:p>
-        </p:txBody>
-      </p:sp>
-      <p:sp>
-        <p:nvSpPr>
-          <p:cNvPr id="58" name="TextBox 57"/>
-          <p:cNvSpPr txBox="1"/>
-          <p:nvPr/>
-        </p:nvSpPr>
-        <p:spPr>
-          <a:xfrm>
-            <a:off x="7360920" y="5111496"/>
-            <a:ext cx="4480560" cy="292608"/>
-          </a:xfrm>
-          <a:prstGeom prst="rect">
-            <a:avLst/>
-          </a:prstGeom>
-          <a:noFill/>
-        </p:spPr>
-        <p:txBody>
-          <a:bodyPr wrap="square">
-            <a:spAutoFit/>
-          </a:bodyPr>
-          <a:lstStyle/>
-          <a:p>
-            <a:pPr algn="l"/>
-            <a:r>
-              <a:rPr sz="1200" b="0" i="0">
-                <a:solidFill>
-                  <a:srgbClr val="94A3B8"/>
-                </a:solidFill>
-              </a:rPr>
-              <a:t>성능 비교 + Baseline + 유의성 표시</a:t>
-            </a:r>
-          </a:p>
-        </p:txBody>
-      </p:sp>
-      <p:sp>
-        <p:nvSpPr>
-          <p:cNvPr id="59" name="TextBox 58"/>
-          <p:cNvSpPr txBox="1"/>
-          <p:nvPr/>
-        </p:nvSpPr>
-        <p:spPr>
-          <a:xfrm>
-            <a:off x="6583680" y="5495544"/>
-            <a:ext cx="731520" cy="292608"/>
-          </a:xfrm>
-          <a:prstGeom prst="rect">
-            <a:avLst/>
-          </a:prstGeom>
-          <a:noFill/>
-        </p:spPr>
-        <p:txBody>
-          <a:bodyPr wrap="square">
-            <a:spAutoFit/>
-          </a:bodyPr>
-          <a:lstStyle/>
-          <a:p>
-            <a:pPr algn="l"/>
-            <a:r>
-              <a:rPr sz="1200" b="1" i="0">
-                <a:solidFill>
-                  <a:srgbClr val="94A3B8"/>
-                </a:solidFill>
-              </a:rPr>
-              <a:t>▸  TAB 4</a:t>
-            </a:r>
-          </a:p>
-        </p:txBody>
-      </p:sp>
-      <p:sp>
-        <p:nvSpPr>
-          <p:cNvPr id="60" name="TextBox 59"/>
-          <p:cNvSpPr txBox="1"/>
-          <p:nvPr/>
-        </p:nvSpPr>
-        <p:spPr>
-          <a:xfrm>
-            <a:off x="7360920" y="5495544"/>
-            <a:ext cx="4480560" cy="292608"/>
-          </a:xfrm>
-          <a:prstGeom prst="rect">
-            <a:avLst/>
-          </a:prstGeom>
-          <a:noFill/>
-        </p:spPr>
-        <p:txBody>
-          <a:bodyPr wrap="square">
-            <a:spAutoFit/>
-          </a:bodyPr>
-          <a:lstStyle/>
-          <a:p>
-            <a:pPr algn="l"/>
-            <a:r>
-              <a:rPr sz="1200" b="0" i="0">
-                <a:solidFill>
-                  <a:srgbClr val="94A3B8"/>
-                </a:solidFill>
-              </a:rPr>
-              <a:t>거시지표 (VIX·DXY·WTI·금리차)</a:t>
+                  <a:srgbClr val="FFFFFF"/>
+                </a:solidFill>
+              </a:rPr>
+              <a:t>핵심 결론: 멀티스케일 피처 + 4모델 앙상블로 Persistence baseline 대비 15.6% RMSE 개선 — 단, Walk-Forward Validation으로 일반화 성능 추가 검증 필요</a:t>
             </a:r>
           </a:p>
         </p:txBody>
@@ -16812,6 +14823,2226 @@
 </file>
 
 <file path=ppt/slides/slide8.xml><?xml version="1.0" encoding="utf-8"?>
+<p:sld xmlns:a="http://schemas.openxmlformats.org/drawingml/2006/main" xmlns:p="http://schemas.openxmlformats.org/presentationml/2006/main" xmlns:r="http://schemas.openxmlformats.org/officeDocument/2006/relationships">
+  <p:cSld>
+    <p:spTree>
+      <p:nvGrpSpPr>
+        <p:cNvPr id="1" name=""/>
+        <p:cNvGrpSpPr/>
+        <p:nvPr/>
+      </p:nvGrpSpPr>
+      <p:grpSpPr/>
+      <p:sp>
+        <p:nvSpPr>
+          <p:cNvPr id="2" name="Rectangle 1"/>
+          <p:cNvSpPr/>
+          <p:nvPr/>
+        </p:nvSpPr>
+        <p:spPr>
+          <a:xfrm>
+            <a:off x="0" y="0"/>
+            <a:ext cx="12188952" cy="6858000"/>
+          </a:xfrm>
+          <a:prstGeom prst="rect">
+            <a:avLst/>
+          </a:prstGeom>
+          <a:solidFill>
+            <a:srgbClr val="0B1120"/>
+          </a:solidFill>
+          <a:ln>
+            <a:noFill/>
+          </a:ln>
+        </p:spPr>
+        <p:style>
+          <a:lnRef idx="1">
+            <a:schemeClr val="accent1"/>
+          </a:lnRef>
+          <a:fillRef idx="3">
+            <a:schemeClr val="accent1"/>
+          </a:fillRef>
+          <a:effectRef idx="2">
+            <a:schemeClr val="accent1"/>
+          </a:effectRef>
+          <a:fontRef idx="minor">
+            <a:schemeClr val="lt1"/>
+          </a:fontRef>
+        </p:style>
+        <p:txBody>
+          <a:bodyPr rtlCol="0" anchor="ctr"/>
+          <a:lstStyle/>
+          <a:p>
+            <a:pPr algn="ctr"/>
+          </a:p>
+        </p:txBody>
+      </p:sp>
+      <p:sp>
+        <p:nvSpPr>
+          <p:cNvPr id="3" name="TextBox 2"/>
+          <p:cNvSpPr txBox="1"/>
+          <p:nvPr/>
+        </p:nvSpPr>
+        <p:spPr>
+          <a:xfrm>
+            <a:off x="411480" y="182880"/>
+            <a:ext cx="10972800" cy="320040"/>
+          </a:xfrm>
+          <a:prstGeom prst="rect">
+            <a:avLst/>
+          </a:prstGeom>
+          <a:noFill/>
+        </p:spPr>
+        <p:txBody>
+          <a:bodyPr wrap="square">
+            <a:spAutoFit/>
+          </a:bodyPr>
+          <a:lstStyle/>
+          <a:p>
+            <a:pPr algn="l"/>
+            <a:r>
+              <a:rPr sz="900" b="0" i="0">
+                <a:solidFill>
+                  <a:srgbClr val="22C55E"/>
+                </a:solidFill>
+              </a:rPr>
+              <a:t>D E P L O Y M E N T  ·  배 포   아 키 텍 처</a:t>
+            </a:r>
+          </a:p>
+        </p:txBody>
+      </p:sp>
+      <p:sp>
+        <p:nvSpPr>
+          <p:cNvPr id="4" name="TextBox 3"/>
+          <p:cNvSpPr txBox="1"/>
+          <p:nvPr/>
+        </p:nvSpPr>
+        <p:spPr>
+          <a:xfrm>
+            <a:off x="411480" y="475488"/>
+            <a:ext cx="10972800" cy="685800"/>
+          </a:xfrm>
+          <a:prstGeom prst="rect">
+            <a:avLst/>
+          </a:prstGeom>
+          <a:noFill/>
+        </p:spPr>
+        <p:txBody>
+          <a:bodyPr wrap="square">
+            <a:spAutoFit/>
+          </a:bodyPr>
+          <a:lstStyle/>
+          <a:p>
+            <a:pPr algn="l"/>
+            <a:r>
+              <a:rPr sz="3800" b="1" i="0">
+                <a:solidFill>
+                  <a:srgbClr val="FFFFFF"/>
+                </a:solidFill>
+              </a:rPr>
+              <a:t>실시간 배포 아키텍처</a:t>
+            </a:r>
+          </a:p>
+        </p:txBody>
+      </p:sp>
+      <p:sp>
+        <p:nvSpPr>
+          <p:cNvPr id="5" name="Rectangle 4"/>
+          <p:cNvSpPr/>
+          <p:nvPr/>
+        </p:nvSpPr>
+        <p:spPr>
+          <a:xfrm>
+            <a:off x="411480" y="1389888"/>
+            <a:ext cx="11365992" cy="19050"/>
+          </a:xfrm>
+          <a:prstGeom prst="rect">
+            <a:avLst/>
+          </a:prstGeom>
+          <a:solidFill>
+            <a:srgbClr val="64748B"/>
+          </a:solidFill>
+          <a:ln>
+            <a:noFill/>
+          </a:ln>
+        </p:spPr>
+        <p:style>
+          <a:lnRef idx="1">
+            <a:schemeClr val="accent1"/>
+          </a:lnRef>
+          <a:fillRef idx="3">
+            <a:schemeClr val="accent1"/>
+          </a:fillRef>
+          <a:effectRef idx="2">
+            <a:schemeClr val="accent1"/>
+          </a:effectRef>
+          <a:fontRef idx="minor">
+            <a:schemeClr val="lt1"/>
+          </a:fontRef>
+        </p:style>
+        <p:txBody>
+          <a:bodyPr rtlCol="0" anchor="ctr"/>
+          <a:lstStyle/>
+          <a:p>
+            <a:pPr algn="ctr"/>
+          </a:p>
+        </p:txBody>
+      </p:sp>
+      <p:sp>
+        <p:nvSpPr>
+          <p:cNvPr id="6" name="Rectangle 5"/>
+          <p:cNvSpPr/>
+          <p:nvPr/>
+        </p:nvSpPr>
+        <p:spPr>
+          <a:xfrm>
+            <a:off x="411480" y="1536192"/>
+            <a:ext cx="2057400" cy="2103120"/>
+          </a:xfrm>
+          <a:prstGeom prst="rect">
+            <a:avLst/>
+          </a:prstGeom>
+          <a:solidFill>
+            <a:srgbClr val="0F1E30"/>
+          </a:solidFill>
+          <a:ln w="25400">
+            <a:solidFill>
+              <a:srgbClr val="F59E0B"/>
+            </a:solidFill>
+          </a:ln>
+        </p:spPr>
+        <p:style>
+          <a:lnRef idx="1">
+            <a:schemeClr val="accent1"/>
+          </a:lnRef>
+          <a:fillRef idx="3">
+            <a:schemeClr val="accent1"/>
+          </a:fillRef>
+          <a:effectRef idx="2">
+            <a:schemeClr val="accent1"/>
+          </a:effectRef>
+          <a:fontRef idx="minor">
+            <a:schemeClr val="lt1"/>
+          </a:fontRef>
+        </p:style>
+        <p:txBody>
+          <a:bodyPr rtlCol="0" anchor="ctr"/>
+          <a:lstStyle/>
+          <a:p>
+            <a:pPr algn="ctr"/>
+          </a:p>
+        </p:txBody>
+      </p:sp>
+      <p:sp>
+        <p:nvSpPr>
+          <p:cNvPr id="7" name="TextBox 6"/>
+          <p:cNvSpPr txBox="1"/>
+          <p:nvPr/>
+        </p:nvSpPr>
+        <p:spPr>
+          <a:xfrm>
+            <a:off x="411480" y="1627632"/>
+            <a:ext cx="2057400" cy="548640"/>
+          </a:xfrm>
+          <a:prstGeom prst="rect">
+            <a:avLst/>
+          </a:prstGeom>
+          <a:noFill/>
+        </p:spPr>
+        <p:txBody>
+          <a:bodyPr wrap="square">
+            <a:spAutoFit/>
+          </a:bodyPr>
+          <a:lstStyle/>
+          <a:p>
+            <a:pPr algn="ctr"/>
+            <a:r>
+              <a:rPr sz="1600" b="1" i="0">
+                <a:solidFill>
+                  <a:srgbClr val="F59E0B"/>
+                </a:solidFill>
+              </a:rPr>
+              <a:t>Google
+Colab</a:t>
+            </a:r>
+          </a:p>
+        </p:txBody>
+      </p:sp>
+      <p:sp>
+        <p:nvSpPr>
+          <p:cNvPr id="8" name="TextBox 7"/>
+          <p:cNvSpPr txBox="1"/>
+          <p:nvPr/>
+        </p:nvSpPr>
+        <p:spPr>
+          <a:xfrm>
+            <a:off x="502920" y="2194560"/>
+            <a:ext cx="1892808" cy="1280160"/>
+          </a:xfrm>
+          <a:prstGeom prst="rect">
+            <a:avLst/>
+          </a:prstGeom>
+          <a:noFill/>
+        </p:spPr>
+        <p:txBody>
+          <a:bodyPr wrap="square">
+            <a:spAutoFit/>
+          </a:bodyPr>
+          <a:lstStyle/>
+          <a:p>
+            <a:pPr algn="ctr"/>
+            <a:r>
+              <a:rPr sz="1300" b="0" i="0">
+                <a:solidFill>
+                  <a:srgbClr val="94A3B8"/>
+                </a:solidFill>
+              </a:rPr>
+              <a:t>T4 GPU
+train.py
+주 1회</a:t>
+            </a:r>
+          </a:p>
+        </p:txBody>
+      </p:sp>
+      <p:sp>
+        <p:nvSpPr>
+          <p:cNvPr id="9" name="TextBox 8"/>
+          <p:cNvSpPr txBox="1"/>
+          <p:nvPr/>
+        </p:nvSpPr>
+        <p:spPr>
+          <a:xfrm>
+            <a:off x="2468880" y="2313432"/>
+            <a:ext cx="201168" cy="457200"/>
+          </a:xfrm>
+          <a:prstGeom prst="rect">
+            <a:avLst/>
+          </a:prstGeom>
+          <a:noFill/>
+        </p:spPr>
+        <p:txBody>
+          <a:bodyPr wrap="square">
+            <a:spAutoFit/>
+          </a:bodyPr>
+          <a:lstStyle/>
+          <a:p>
+            <a:pPr algn="l"/>
+            <a:r>
+              <a:rPr sz="2000" b="1" i="0">
+                <a:solidFill>
+                  <a:srgbClr val="64748B"/>
+                </a:solidFill>
+              </a:rPr>
+              <a:t>→</a:t>
+            </a:r>
+          </a:p>
+        </p:txBody>
+      </p:sp>
+      <p:sp>
+        <p:nvSpPr>
+          <p:cNvPr id="10" name="Rectangle 9"/>
+          <p:cNvSpPr/>
+          <p:nvPr/>
+        </p:nvSpPr>
+        <p:spPr>
+          <a:xfrm>
+            <a:off x="2679192" y="1536192"/>
+            <a:ext cx="2057400" cy="2103120"/>
+          </a:xfrm>
+          <a:prstGeom prst="rect">
+            <a:avLst/>
+          </a:prstGeom>
+          <a:solidFill>
+            <a:srgbClr val="0F1E30"/>
+          </a:solidFill>
+          <a:ln w="25400">
+            <a:solidFill>
+              <a:srgbClr val="22C55E"/>
+            </a:solidFill>
+          </a:ln>
+        </p:spPr>
+        <p:style>
+          <a:lnRef idx="1">
+            <a:schemeClr val="accent1"/>
+          </a:lnRef>
+          <a:fillRef idx="3">
+            <a:schemeClr val="accent1"/>
+          </a:fillRef>
+          <a:effectRef idx="2">
+            <a:schemeClr val="accent1"/>
+          </a:effectRef>
+          <a:fontRef idx="minor">
+            <a:schemeClr val="lt1"/>
+          </a:fontRef>
+        </p:style>
+        <p:txBody>
+          <a:bodyPr rtlCol="0" anchor="ctr"/>
+          <a:lstStyle/>
+          <a:p>
+            <a:pPr algn="ctr"/>
+          </a:p>
+        </p:txBody>
+      </p:sp>
+      <p:sp>
+        <p:nvSpPr>
+          <p:cNvPr id="11" name="TextBox 10"/>
+          <p:cNvSpPr txBox="1"/>
+          <p:nvPr/>
+        </p:nvSpPr>
+        <p:spPr>
+          <a:xfrm>
+            <a:off x="2679192" y="1627632"/>
+            <a:ext cx="2057400" cy="548640"/>
+          </a:xfrm>
+          <a:prstGeom prst="rect">
+            <a:avLst/>
+          </a:prstGeom>
+          <a:noFill/>
+        </p:spPr>
+        <p:txBody>
+          <a:bodyPr wrap="square">
+            <a:spAutoFit/>
+          </a:bodyPr>
+          <a:lstStyle/>
+          <a:p>
+            <a:pPr algn="ctr"/>
+            <a:r>
+              <a:rPr sz="1600" b="1" i="0">
+                <a:solidFill>
+                  <a:srgbClr val="22C55E"/>
+                </a:solidFill>
+              </a:rPr>
+              <a:t>GitHub
+(main)</a:t>
+            </a:r>
+          </a:p>
+        </p:txBody>
+      </p:sp>
+      <p:sp>
+        <p:nvSpPr>
+          <p:cNvPr id="12" name="TextBox 11"/>
+          <p:cNvSpPr txBox="1"/>
+          <p:nvPr/>
+        </p:nvSpPr>
+        <p:spPr>
+          <a:xfrm>
+            <a:off x="2770632" y="2194560"/>
+            <a:ext cx="1892808" cy="1280160"/>
+          </a:xfrm>
+          <a:prstGeom prst="rect">
+            <a:avLst/>
+          </a:prstGeom>
+          <a:noFill/>
+        </p:spPr>
+        <p:txBody>
+          <a:bodyPr wrap="square">
+            <a:spAutoFit/>
+          </a:bodyPr>
+          <a:lstStyle/>
+          <a:p>
+            <a:pPr algn="ctr"/>
+            <a:r>
+              <a:rPr sz="1300" b="0" i="0">
+                <a:solidFill>
+                  <a:srgbClr val="94A3B8"/>
+                </a:solidFill>
+              </a:rPr>
+              <a:t>모델 파일
+코드 관리
+Actions</a:t>
+            </a:r>
+          </a:p>
+        </p:txBody>
+      </p:sp>
+      <p:sp>
+        <p:nvSpPr>
+          <p:cNvPr id="13" name="TextBox 12"/>
+          <p:cNvSpPr txBox="1"/>
+          <p:nvPr/>
+        </p:nvSpPr>
+        <p:spPr>
+          <a:xfrm>
+            <a:off x="4736592" y="2313432"/>
+            <a:ext cx="201168" cy="457200"/>
+          </a:xfrm>
+          <a:prstGeom prst="rect">
+            <a:avLst/>
+          </a:prstGeom>
+          <a:noFill/>
+        </p:spPr>
+        <p:txBody>
+          <a:bodyPr wrap="square">
+            <a:spAutoFit/>
+          </a:bodyPr>
+          <a:lstStyle/>
+          <a:p>
+            <a:pPr algn="l"/>
+            <a:r>
+              <a:rPr sz="2000" b="1" i="0">
+                <a:solidFill>
+                  <a:srgbClr val="64748B"/>
+                </a:solidFill>
+              </a:rPr>
+              <a:t>→</a:t>
+            </a:r>
+          </a:p>
+        </p:txBody>
+      </p:sp>
+      <p:sp>
+        <p:nvSpPr>
+          <p:cNvPr id="14" name="Rectangle 13"/>
+          <p:cNvSpPr/>
+          <p:nvPr/>
+        </p:nvSpPr>
+        <p:spPr>
+          <a:xfrm>
+            <a:off x="4946904" y="1536192"/>
+            <a:ext cx="2057400" cy="2103120"/>
+          </a:xfrm>
+          <a:prstGeom prst="rect">
+            <a:avLst/>
+          </a:prstGeom>
+          <a:solidFill>
+            <a:srgbClr val="0F1E30"/>
+          </a:solidFill>
+          <a:ln w="25400">
+            <a:solidFill>
+              <a:srgbClr val="22D3EE"/>
+            </a:solidFill>
+          </a:ln>
+        </p:spPr>
+        <p:style>
+          <a:lnRef idx="1">
+            <a:schemeClr val="accent1"/>
+          </a:lnRef>
+          <a:fillRef idx="3">
+            <a:schemeClr val="accent1"/>
+          </a:fillRef>
+          <a:effectRef idx="2">
+            <a:schemeClr val="accent1"/>
+          </a:effectRef>
+          <a:fontRef idx="minor">
+            <a:schemeClr val="lt1"/>
+          </a:fontRef>
+        </p:style>
+        <p:txBody>
+          <a:bodyPr rtlCol="0" anchor="ctr"/>
+          <a:lstStyle/>
+          <a:p>
+            <a:pPr algn="ctr"/>
+          </a:p>
+        </p:txBody>
+      </p:sp>
+      <p:sp>
+        <p:nvSpPr>
+          <p:cNvPr id="15" name="TextBox 14"/>
+          <p:cNvSpPr txBox="1"/>
+          <p:nvPr/>
+        </p:nvSpPr>
+        <p:spPr>
+          <a:xfrm>
+            <a:off x="4946904" y="1627632"/>
+            <a:ext cx="2057400" cy="548640"/>
+          </a:xfrm>
+          <a:prstGeom prst="rect">
+            <a:avLst/>
+          </a:prstGeom>
+          <a:noFill/>
+        </p:spPr>
+        <p:txBody>
+          <a:bodyPr wrap="square">
+            <a:spAutoFit/>
+          </a:bodyPr>
+          <a:lstStyle/>
+          <a:p>
+            <a:pPr algn="ctr"/>
+            <a:r>
+              <a:rPr sz="1600" b="1" i="0">
+                <a:solidFill>
+                  <a:srgbClr val="22D3EE"/>
+                </a:solidFill>
+              </a:rPr>
+              <a:t>AWS S3</a:t>
+            </a:r>
+          </a:p>
+        </p:txBody>
+      </p:sp>
+      <p:sp>
+        <p:nvSpPr>
+          <p:cNvPr id="16" name="TextBox 15"/>
+          <p:cNvSpPr txBox="1"/>
+          <p:nvPr/>
+        </p:nvSpPr>
+        <p:spPr>
+          <a:xfrm>
+            <a:off x="5038344" y="2194560"/>
+            <a:ext cx="1892808" cy="1280160"/>
+          </a:xfrm>
+          <a:prstGeom prst="rect">
+            <a:avLst/>
+          </a:prstGeom>
+          <a:noFill/>
+        </p:spPr>
+        <p:txBody>
+          <a:bodyPr wrap="square">
+            <a:spAutoFit/>
+          </a:bodyPr>
+          <a:lstStyle/>
+          <a:p>
+            <a:pPr algn="ctr"/>
+            <a:r>
+              <a:rPr sz="1300" b="0" i="0">
+                <a:solidFill>
+                  <a:srgbClr val="94A3B8"/>
+                </a:solidFill>
+              </a:rPr>
+              <a:t>forecast.json
+residual.csv
+백업</a:t>
+            </a:r>
+          </a:p>
+        </p:txBody>
+      </p:sp>
+      <p:sp>
+        <p:nvSpPr>
+          <p:cNvPr id="17" name="TextBox 16"/>
+          <p:cNvSpPr txBox="1"/>
+          <p:nvPr/>
+        </p:nvSpPr>
+        <p:spPr>
+          <a:xfrm>
+            <a:off x="7004304" y="2313432"/>
+            <a:ext cx="201168" cy="457200"/>
+          </a:xfrm>
+          <a:prstGeom prst="rect">
+            <a:avLst/>
+          </a:prstGeom>
+          <a:noFill/>
+        </p:spPr>
+        <p:txBody>
+          <a:bodyPr wrap="square">
+            <a:spAutoFit/>
+          </a:bodyPr>
+          <a:lstStyle/>
+          <a:p>
+            <a:pPr algn="l"/>
+            <a:r>
+              <a:rPr sz="2000" b="1" i="0">
+                <a:solidFill>
+                  <a:srgbClr val="64748B"/>
+                </a:solidFill>
+              </a:rPr>
+              <a:t>→</a:t>
+            </a:r>
+          </a:p>
+        </p:txBody>
+      </p:sp>
+      <p:sp>
+        <p:nvSpPr>
+          <p:cNvPr id="18" name="Rectangle 17"/>
+          <p:cNvSpPr/>
+          <p:nvPr/>
+        </p:nvSpPr>
+        <p:spPr>
+          <a:xfrm>
+            <a:off x="7214616" y="1536192"/>
+            <a:ext cx="2057400" cy="2103120"/>
+          </a:xfrm>
+          <a:prstGeom prst="rect">
+            <a:avLst/>
+          </a:prstGeom>
+          <a:solidFill>
+            <a:srgbClr val="0F1E30"/>
+          </a:solidFill>
+          <a:ln w="25400">
+            <a:solidFill>
+              <a:srgbClr val="A78BFA"/>
+            </a:solidFill>
+          </a:ln>
+        </p:spPr>
+        <p:style>
+          <a:lnRef idx="1">
+            <a:schemeClr val="accent1"/>
+          </a:lnRef>
+          <a:fillRef idx="3">
+            <a:schemeClr val="accent1"/>
+          </a:fillRef>
+          <a:effectRef idx="2">
+            <a:schemeClr val="accent1"/>
+          </a:effectRef>
+          <a:fontRef idx="minor">
+            <a:schemeClr val="lt1"/>
+          </a:fontRef>
+        </p:style>
+        <p:txBody>
+          <a:bodyPr rtlCol="0" anchor="ctr"/>
+          <a:lstStyle/>
+          <a:p>
+            <a:pPr algn="ctr"/>
+          </a:p>
+        </p:txBody>
+      </p:sp>
+      <p:sp>
+        <p:nvSpPr>
+          <p:cNvPr id="19" name="TextBox 18"/>
+          <p:cNvSpPr txBox="1"/>
+          <p:nvPr/>
+        </p:nvSpPr>
+        <p:spPr>
+          <a:xfrm>
+            <a:off x="7214616" y="1627632"/>
+            <a:ext cx="2057400" cy="548640"/>
+          </a:xfrm>
+          <a:prstGeom prst="rect">
+            <a:avLst/>
+          </a:prstGeom>
+          <a:noFill/>
+        </p:spPr>
+        <p:txBody>
+          <a:bodyPr wrap="square">
+            <a:spAutoFit/>
+          </a:bodyPr>
+          <a:lstStyle/>
+          <a:p>
+            <a:pPr algn="ctr"/>
+            <a:r>
+              <a:rPr sz="1600" b="1" i="0">
+                <a:solidFill>
+                  <a:srgbClr val="A78BFA"/>
+                </a:solidFill>
+              </a:rPr>
+              <a:t>EC2/Lambda</a:t>
+            </a:r>
+          </a:p>
+        </p:txBody>
+      </p:sp>
+      <p:sp>
+        <p:nvSpPr>
+          <p:cNvPr id="20" name="TextBox 19"/>
+          <p:cNvSpPr txBox="1"/>
+          <p:nvPr/>
+        </p:nvSpPr>
+        <p:spPr>
+          <a:xfrm>
+            <a:off x="7306056" y="2194560"/>
+            <a:ext cx="1892808" cy="1280160"/>
+          </a:xfrm>
+          <a:prstGeom prst="rect">
+            <a:avLst/>
+          </a:prstGeom>
+          <a:noFill/>
+        </p:spPr>
+        <p:txBody>
+          <a:bodyPr wrap="square">
+            <a:spAutoFit/>
+          </a:bodyPr>
+          <a:lstStyle/>
+          <a:p>
+            <a:pPr algn="ctr"/>
+            <a:r>
+              <a:rPr sz="1300" b="0" i="0">
+                <a:solidFill>
+                  <a:srgbClr val="94A3B8"/>
+                </a:solidFill>
+              </a:rPr>
+              <a:t>KST 06:00
+predict.py
+잔차수집</a:t>
+            </a:r>
+          </a:p>
+        </p:txBody>
+      </p:sp>
+      <p:sp>
+        <p:nvSpPr>
+          <p:cNvPr id="21" name="TextBox 20"/>
+          <p:cNvSpPr txBox="1"/>
+          <p:nvPr/>
+        </p:nvSpPr>
+        <p:spPr>
+          <a:xfrm>
+            <a:off x="9272016" y="2313432"/>
+            <a:ext cx="201168" cy="457200"/>
+          </a:xfrm>
+          <a:prstGeom prst="rect">
+            <a:avLst/>
+          </a:prstGeom>
+          <a:noFill/>
+        </p:spPr>
+        <p:txBody>
+          <a:bodyPr wrap="square">
+            <a:spAutoFit/>
+          </a:bodyPr>
+          <a:lstStyle/>
+          <a:p>
+            <a:pPr algn="l"/>
+            <a:r>
+              <a:rPr sz="2000" b="1" i="0">
+                <a:solidFill>
+                  <a:srgbClr val="64748B"/>
+                </a:solidFill>
+              </a:rPr>
+              <a:t>→</a:t>
+            </a:r>
+          </a:p>
+        </p:txBody>
+      </p:sp>
+      <p:sp>
+        <p:nvSpPr>
+          <p:cNvPr id="22" name="Rectangle 21"/>
+          <p:cNvSpPr/>
+          <p:nvPr/>
+        </p:nvSpPr>
+        <p:spPr>
+          <a:xfrm>
+            <a:off x="9482328" y="1536192"/>
+            <a:ext cx="2057400" cy="2103120"/>
+          </a:xfrm>
+          <a:prstGeom prst="rect">
+            <a:avLst/>
+          </a:prstGeom>
+          <a:solidFill>
+            <a:srgbClr val="0F1E30"/>
+          </a:solidFill>
+          <a:ln w="25400">
+            <a:solidFill>
+              <a:srgbClr val="EF4444"/>
+            </a:solidFill>
+          </a:ln>
+        </p:spPr>
+        <p:style>
+          <a:lnRef idx="1">
+            <a:schemeClr val="accent1"/>
+          </a:lnRef>
+          <a:fillRef idx="3">
+            <a:schemeClr val="accent1"/>
+          </a:fillRef>
+          <a:effectRef idx="2">
+            <a:schemeClr val="accent1"/>
+          </a:effectRef>
+          <a:fontRef idx="minor">
+            <a:schemeClr val="lt1"/>
+          </a:fontRef>
+        </p:style>
+        <p:txBody>
+          <a:bodyPr rtlCol="0" anchor="ctr"/>
+          <a:lstStyle/>
+          <a:p>
+            <a:pPr algn="ctr"/>
+          </a:p>
+        </p:txBody>
+      </p:sp>
+      <p:sp>
+        <p:nvSpPr>
+          <p:cNvPr id="23" name="TextBox 22"/>
+          <p:cNvSpPr txBox="1"/>
+          <p:nvPr/>
+        </p:nvSpPr>
+        <p:spPr>
+          <a:xfrm>
+            <a:off x="9482328" y="1627632"/>
+            <a:ext cx="2057400" cy="548640"/>
+          </a:xfrm>
+          <a:prstGeom prst="rect">
+            <a:avLst/>
+          </a:prstGeom>
+          <a:noFill/>
+        </p:spPr>
+        <p:txBody>
+          <a:bodyPr wrap="square">
+            <a:spAutoFit/>
+          </a:bodyPr>
+          <a:lstStyle/>
+          <a:p>
+            <a:pPr algn="ctr"/>
+            <a:r>
+              <a:rPr sz="1600" b="1" i="0">
+                <a:solidFill>
+                  <a:srgbClr val="EF4444"/>
+                </a:solidFill>
+              </a:rPr>
+              <a:t>Streamlit
+Cloud</a:t>
+            </a:r>
+          </a:p>
+        </p:txBody>
+      </p:sp>
+      <p:sp>
+        <p:nvSpPr>
+          <p:cNvPr id="24" name="TextBox 23"/>
+          <p:cNvSpPr txBox="1"/>
+          <p:nvPr/>
+        </p:nvSpPr>
+        <p:spPr>
+          <a:xfrm>
+            <a:off x="9573768" y="2194560"/>
+            <a:ext cx="1892808" cy="1280160"/>
+          </a:xfrm>
+          <a:prstGeom prst="rect">
+            <a:avLst/>
+          </a:prstGeom>
+          <a:noFill/>
+        </p:spPr>
+        <p:txBody>
+          <a:bodyPr wrap="square">
+            <a:spAutoFit/>
+          </a:bodyPr>
+          <a:lstStyle/>
+          <a:p>
+            <a:pPr algn="ctr"/>
+            <a:r>
+              <a:rPr sz="1300" b="0" i="0">
+                <a:solidFill>
+                  <a:srgbClr val="94A3B8"/>
+                </a:solidFill>
+              </a:rPr>
+              <a:t>실시간 차트
+LGB 추론
+5분 캐시</a:t>
+            </a:r>
+          </a:p>
+        </p:txBody>
+      </p:sp>
+      <p:sp>
+        <p:nvSpPr>
+          <p:cNvPr id="25" name="Rectangle 24"/>
+          <p:cNvSpPr/>
+          <p:nvPr/>
+        </p:nvSpPr>
+        <p:spPr>
+          <a:xfrm>
+            <a:off x="411480" y="3822191"/>
+            <a:ext cx="11365992" cy="2743200"/>
+          </a:xfrm>
+          <a:prstGeom prst="rect">
+            <a:avLst/>
+          </a:prstGeom>
+          <a:solidFill>
+            <a:srgbClr val="0F1E30"/>
+          </a:solidFill>
+          <a:ln w="12700">
+            <a:solidFill>
+              <a:srgbClr val="64748B"/>
+            </a:solidFill>
+          </a:ln>
+        </p:spPr>
+        <p:style>
+          <a:lnRef idx="1">
+            <a:schemeClr val="accent1"/>
+          </a:lnRef>
+          <a:fillRef idx="3">
+            <a:schemeClr val="accent1"/>
+          </a:fillRef>
+          <a:effectRef idx="2">
+            <a:schemeClr val="accent1"/>
+          </a:effectRef>
+          <a:fontRef idx="minor">
+            <a:schemeClr val="lt1"/>
+          </a:fontRef>
+        </p:style>
+        <p:txBody>
+          <a:bodyPr rtlCol="0" anchor="ctr"/>
+          <a:lstStyle/>
+          <a:p>
+            <a:pPr algn="ctr"/>
+          </a:p>
+        </p:txBody>
+      </p:sp>
+      <p:sp>
+        <p:nvSpPr>
+          <p:cNvPr id="26" name="TextBox 25"/>
+          <p:cNvSpPr txBox="1"/>
+          <p:nvPr/>
+        </p:nvSpPr>
+        <p:spPr>
+          <a:xfrm>
+            <a:off x="594360" y="3913632"/>
+            <a:ext cx="7315200" cy="347472"/>
+          </a:xfrm>
+          <a:prstGeom prst="rect">
+            <a:avLst/>
+          </a:prstGeom>
+          <a:noFill/>
+        </p:spPr>
+        <p:txBody>
+          <a:bodyPr wrap="square">
+            <a:spAutoFit/>
+          </a:bodyPr>
+          <a:lstStyle/>
+          <a:p>
+            <a:pPr algn="l"/>
+            <a:r>
+              <a:rPr sz="1400" b="1" i="0">
+                <a:solidFill>
+                  <a:srgbClr val="22C55E"/>
+                </a:solidFill>
+              </a:rPr>
+              <a:t>colab_master.ipynb — 8셀 자동화</a:t>
+            </a:r>
+          </a:p>
+        </p:txBody>
+      </p:sp>
+      <p:sp>
+        <p:nvSpPr>
+          <p:cNvPr id="27" name="Rectangle 26"/>
+          <p:cNvSpPr/>
+          <p:nvPr/>
+        </p:nvSpPr>
+        <p:spPr>
+          <a:xfrm>
+            <a:off x="502920" y="4315968"/>
+            <a:ext cx="1371600" cy="685800"/>
+          </a:xfrm>
+          <a:prstGeom prst="rect">
+            <a:avLst/>
+          </a:prstGeom>
+          <a:solidFill>
+            <a:srgbClr val="132740"/>
+          </a:solidFill>
+          <a:ln w="12700">
+            <a:solidFill>
+              <a:srgbClr val="F59E0B"/>
+            </a:solidFill>
+          </a:ln>
+        </p:spPr>
+        <p:style>
+          <a:lnRef idx="1">
+            <a:schemeClr val="accent1"/>
+          </a:lnRef>
+          <a:fillRef idx="3">
+            <a:schemeClr val="accent1"/>
+          </a:fillRef>
+          <a:effectRef idx="2">
+            <a:schemeClr val="accent1"/>
+          </a:effectRef>
+          <a:fontRef idx="minor">
+            <a:schemeClr val="lt1"/>
+          </a:fontRef>
+        </p:style>
+        <p:txBody>
+          <a:bodyPr rtlCol="0" anchor="ctr"/>
+          <a:lstStyle/>
+          <a:p>
+            <a:pPr algn="ctr"/>
+          </a:p>
+        </p:txBody>
+      </p:sp>
+      <p:sp>
+        <p:nvSpPr>
+          <p:cNvPr id="28" name="TextBox 27"/>
+          <p:cNvSpPr txBox="1"/>
+          <p:nvPr/>
+        </p:nvSpPr>
+        <p:spPr>
+          <a:xfrm>
+            <a:off x="576072" y="4370832"/>
+            <a:ext cx="457200" cy="274320"/>
+          </a:xfrm>
+          <a:prstGeom prst="rect">
+            <a:avLst/>
+          </a:prstGeom>
+          <a:noFill/>
+        </p:spPr>
+        <p:txBody>
+          <a:bodyPr wrap="square">
+            <a:spAutoFit/>
+          </a:bodyPr>
+          <a:lstStyle/>
+          <a:p>
+            <a:pPr algn="l"/>
+            <a:r>
+              <a:rPr sz="1200" b="1" i="0">
+                <a:solidFill>
+                  <a:srgbClr val="F59E0B"/>
+                </a:solidFill>
+              </a:rPr>
+              <a:t>셀 1</a:t>
+            </a:r>
+          </a:p>
+        </p:txBody>
+      </p:sp>
+      <p:sp>
+        <p:nvSpPr>
+          <p:cNvPr id="29" name="TextBox 28"/>
+          <p:cNvSpPr txBox="1"/>
+          <p:nvPr/>
+        </p:nvSpPr>
+        <p:spPr>
+          <a:xfrm>
+            <a:off x="576072" y="4645152"/>
+            <a:ext cx="1243584" cy="274320"/>
+          </a:xfrm>
+          <a:prstGeom prst="rect">
+            <a:avLst/>
+          </a:prstGeom>
+          <a:noFill/>
+        </p:spPr>
+        <p:txBody>
+          <a:bodyPr wrap="square">
+            <a:spAutoFit/>
+          </a:bodyPr>
+          <a:lstStyle/>
+          <a:p>
+            <a:pPr algn="l"/>
+            <a:r>
+              <a:rPr sz="1100" b="0" i="0">
+                <a:solidFill>
+                  <a:srgbClr val="FFFFFF"/>
+                </a:solidFill>
+              </a:rPr>
+              <a:t>GitHub Secrets</a:t>
+            </a:r>
+          </a:p>
+        </p:txBody>
+      </p:sp>
+      <p:sp>
+        <p:nvSpPr>
+          <p:cNvPr id="30" name="Rectangle 29"/>
+          <p:cNvSpPr/>
+          <p:nvPr/>
+        </p:nvSpPr>
+        <p:spPr>
+          <a:xfrm>
+            <a:off x="1984248" y="4315968"/>
+            <a:ext cx="1371600" cy="685800"/>
+          </a:xfrm>
+          <a:prstGeom prst="rect">
+            <a:avLst/>
+          </a:prstGeom>
+          <a:solidFill>
+            <a:srgbClr val="132740"/>
+          </a:solidFill>
+          <a:ln w="12700">
+            <a:solidFill>
+              <a:srgbClr val="94A3B8"/>
+            </a:solidFill>
+          </a:ln>
+        </p:spPr>
+        <p:style>
+          <a:lnRef idx="1">
+            <a:schemeClr val="accent1"/>
+          </a:lnRef>
+          <a:fillRef idx="3">
+            <a:schemeClr val="accent1"/>
+          </a:fillRef>
+          <a:effectRef idx="2">
+            <a:schemeClr val="accent1"/>
+          </a:effectRef>
+          <a:fontRef idx="minor">
+            <a:schemeClr val="lt1"/>
+          </a:fontRef>
+        </p:style>
+        <p:txBody>
+          <a:bodyPr rtlCol="0" anchor="ctr"/>
+          <a:lstStyle/>
+          <a:p>
+            <a:pPr algn="ctr"/>
+          </a:p>
+        </p:txBody>
+      </p:sp>
+      <p:sp>
+        <p:nvSpPr>
+          <p:cNvPr id="31" name="TextBox 30"/>
+          <p:cNvSpPr txBox="1"/>
+          <p:nvPr/>
+        </p:nvSpPr>
+        <p:spPr>
+          <a:xfrm>
+            <a:off x="2057400" y="4370832"/>
+            <a:ext cx="457200" cy="274320"/>
+          </a:xfrm>
+          <a:prstGeom prst="rect">
+            <a:avLst/>
+          </a:prstGeom>
+          <a:noFill/>
+        </p:spPr>
+        <p:txBody>
+          <a:bodyPr wrap="square">
+            <a:spAutoFit/>
+          </a:bodyPr>
+          <a:lstStyle/>
+          <a:p>
+            <a:pPr algn="l"/>
+            <a:r>
+              <a:rPr sz="1200" b="1" i="0">
+                <a:solidFill>
+                  <a:srgbClr val="94A3B8"/>
+                </a:solidFill>
+              </a:rPr>
+              <a:t>셀 2</a:t>
+            </a:r>
+          </a:p>
+        </p:txBody>
+      </p:sp>
+      <p:sp>
+        <p:nvSpPr>
+          <p:cNvPr id="32" name="TextBox 31"/>
+          <p:cNvSpPr txBox="1"/>
+          <p:nvPr/>
+        </p:nvSpPr>
+        <p:spPr>
+          <a:xfrm>
+            <a:off x="2057400" y="4645152"/>
+            <a:ext cx="1243584" cy="274320"/>
+          </a:xfrm>
+          <a:prstGeom prst="rect">
+            <a:avLst/>
+          </a:prstGeom>
+          <a:noFill/>
+        </p:spPr>
+        <p:txBody>
+          <a:bodyPr wrap="square">
+            <a:spAutoFit/>
+          </a:bodyPr>
+          <a:lstStyle/>
+          <a:p>
+            <a:pPr algn="l"/>
+            <a:r>
+              <a:rPr sz="1100" b="0" i="0">
+                <a:solidFill>
+                  <a:srgbClr val="FFFFFF"/>
+                </a:solidFill>
+              </a:rPr>
+              <a:t>Drive + 클론</a:t>
+            </a:r>
+          </a:p>
+        </p:txBody>
+      </p:sp>
+      <p:sp>
+        <p:nvSpPr>
+          <p:cNvPr id="33" name="Rectangle 32"/>
+          <p:cNvSpPr/>
+          <p:nvPr/>
+        </p:nvSpPr>
+        <p:spPr>
+          <a:xfrm>
+            <a:off x="3465576" y="4315968"/>
+            <a:ext cx="1371600" cy="685800"/>
+          </a:xfrm>
+          <a:prstGeom prst="rect">
+            <a:avLst/>
+          </a:prstGeom>
+          <a:solidFill>
+            <a:srgbClr val="132740"/>
+          </a:solidFill>
+          <a:ln w="12700">
+            <a:solidFill>
+              <a:srgbClr val="94A3B8"/>
+            </a:solidFill>
+          </a:ln>
+        </p:spPr>
+        <p:style>
+          <a:lnRef idx="1">
+            <a:schemeClr val="accent1"/>
+          </a:lnRef>
+          <a:fillRef idx="3">
+            <a:schemeClr val="accent1"/>
+          </a:fillRef>
+          <a:effectRef idx="2">
+            <a:schemeClr val="accent1"/>
+          </a:effectRef>
+          <a:fontRef idx="minor">
+            <a:schemeClr val="lt1"/>
+          </a:fontRef>
+        </p:style>
+        <p:txBody>
+          <a:bodyPr rtlCol="0" anchor="ctr"/>
+          <a:lstStyle/>
+          <a:p>
+            <a:pPr algn="ctr"/>
+          </a:p>
+        </p:txBody>
+      </p:sp>
+      <p:sp>
+        <p:nvSpPr>
+          <p:cNvPr id="34" name="TextBox 33"/>
+          <p:cNvSpPr txBox="1"/>
+          <p:nvPr/>
+        </p:nvSpPr>
+        <p:spPr>
+          <a:xfrm>
+            <a:off x="3538728" y="4370832"/>
+            <a:ext cx="457200" cy="274320"/>
+          </a:xfrm>
+          <a:prstGeom prst="rect">
+            <a:avLst/>
+          </a:prstGeom>
+          <a:noFill/>
+        </p:spPr>
+        <p:txBody>
+          <a:bodyPr wrap="square">
+            <a:spAutoFit/>
+          </a:bodyPr>
+          <a:lstStyle/>
+          <a:p>
+            <a:pPr algn="l"/>
+            <a:r>
+              <a:rPr sz="1200" b="1" i="0">
+                <a:solidFill>
+                  <a:srgbClr val="94A3B8"/>
+                </a:solidFill>
+              </a:rPr>
+              <a:t>셀 3</a:t>
+            </a:r>
+          </a:p>
+        </p:txBody>
+      </p:sp>
+      <p:sp>
+        <p:nvSpPr>
+          <p:cNvPr id="35" name="TextBox 34"/>
+          <p:cNvSpPr txBox="1"/>
+          <p:nvPr/>
+        </p:nvSpPr>
+        <p:spPr>
+          <a:xfrm>
+            <a:off x="3538728" y="4645152"/>
+            <a:ext cx="1243584" cy="274320"/>
+          </a:xfrm>
+          <a:prstGeom prst="rect">
+            <a:avLst/>
+          </a:prstGeom>
+          <a:noFill/>
+        </p:spPr>
+        <p:txBody>
+          <a:bodyPr wrap="square">
+            <a:spAutoFit/>
+          </a:bodyPr>
+          <a:lstStyle/>
+          <a:p>
+            <a:pPr algn="l"/>
+            <a:r>
+              <a:rPr sz="1100" b="0" i="0">
+                <a:solidFill>
+                  <a:srgbClr val="FFFFFF"/>
+                </a:solidFill>
+              </a:rPr>
+              <a:t>패키지 설치</a:t>
+            </a:r>
+          </a:p>
+        </p:txBody>
+      </p:sp>
+      <p:sp>
+        <p:nvSpPr>
+          <p:cNvPr id="36" name="Rectangle 35"/>
+          <p:cNvSpPr/>
+          <p:nvPr/>
+        </p:nvSpPr>
+        <p:spPr>
+          <a:xfrm>
+            <a:off x="4946904" y="4315968"/>
+            <a:ext cx="1371600" cy="685800"/>
+          </a:xfrm>
+          <a:prstGeom prst="rect">
+            <a:avLst/>
+          </a:prstGeom>
+          <a:solidFill>
+            <a:srgbClr val="132740"/>
+          </a:solidFill>
+          <a:ln w="12700">
+            <a:solidFill>
+              <a:srgbClr val="94A3B8"/>
+            </a:solidFill>
+          </a:ln>
+        </p:spPr>
+        <p:style>
+          <a:lnRef idx="1">
+            <a:schemeClr val="accent1"/>
+          </a:lnRef>
+          <a:fillRef idx="3">
+            <a:schemeClr val="accent1"/>
+          </a:fillRef>
+          <a:effectRef idx="2">
+            <a:schemeClr val="accent1"/>
+          </a:effectRef>
+          <a:fontRef idx="minor">
+            <a:schemeClr val="lt1"/>
+          </a:fontRef>
+        </p:style>
+        <p:txBody>
+          <a:bodyPr rtlCol="0" anchor="ctr"/>
+          <a:lstStyle/>
+          <a:p>
+            <a:pPr algn="ctr"/>
+          </a:p>
+        </p:txBody>
+      </p:sp>
+      <p:sp>
+        <p:nvSpPr>
+          <p:cNvPr id="37" name="TextBox 36"/>
+          <p:cNvSpPr txBox="1"/>
+          <p:nvPr/>
+        </p:nvSpPr>
+        <p:spPr>
+          <a:xfrm>
+            <a:off x="5020056" y="4370832"/>
+            <a:ext cx="457200" cy="274320"/>
+          </a:xfrm>
+          <a:prstGeom prst="rect">
+            <a:avLst/>
+          </a:prstGeom>
+          <a:noFill/>
+        </p:spPr>
+        <p:txBody>
+          <a:bodyPr wrap="square">
+            <a:spAutoFit/>
+          </a:bodyPr>
+          <a:lstStyle/>
+          <a:p>
+            <a:pPr algn="l"/>
+            <a:r>
+              <a:rPr sz="1200" b="1" i="0">
+                <a:solidFill>
+                  <a:srgbClr val="94A3B8"/>
+                </a:solidFill>
+              </a:rPr>
+              <a:t>셀 4</a:t>
+            </a:r>
+          </a:p>
+        </p:txBody>
+      </p:sp>
+      <p:sp>
+        <p:nvSpPr>
+          <p:cNvPr id="38" name="TextBox 37"/>
+          <p:cNvSpPr txBox="1"/>
+          <p:nvPr/>
+        </p:nvSpPr>
+        <p:spPr>
+          <a:xfrm>
+            <a:off x="5020056" y="4645152"/>
+            <a:ext cx="1243584" cy="274320"/>
+          </a:xfrm>
+          <a:prstGeom prst="rect">
+            <a:avLst/>
+          </a:prstGeom>
+          <a:noFill/>
+        </p:spPr>
+        <p:txBody>
+          <a:bodyPr wrap="square">
+            <a:spAutoFit/>
+          </a:bodyPr>
+          <a:lstStyle/>
+          <a:p>
+            <a:pPr algn="l"/>
+            <a:r>
+              <a:rPr sz="1100" b="0" i="0">
+                <a:solidFill>
+                  <a:srgbClr val="FFFFFF"/>
+                </a:solidFill>
+              </a:rPr>
+              <a:t>git pull</a:t>
+            </a:r>
+          </a:p>
+        </p:txBody>
+      </p:sp>
+      <p:sp>
+        <p:nvSpPr>
+          <p:cNvPr id="39" name="Rectangle 38"/>
+          <p:cNvSpPr/>
+          <p:nvPr/>
+        </p:nvSpPr>
+        <p:spPr>
+          <a:xfrm>
+            <a:off x="502920" y="5074920"/>
+            <a:ext cx="1371600" cy="685800"/>
+          </a:xfrm>
+          <a:prstGeom prst="rect">
+            <a:avLst/>
+          </a:prstGeom>
+          <a:solidFill>
+            <a:srgbClr val="132740"/>
+          </a:solidFill>
+          <a:ln w="12700">
+            <a:solidFill>
+              <a:srgbClr val="22C55E"/>
+            </a:solidFill>
+          </a:ln>
+        </p:spPr>
+        <p:style>
+          <a:lnRef idx="1">
+            <a:schemeClr val="accent1"/>
+          </a:lnRef>
+          <a:fillRef idx="3">
+            <a:schemeClr val="accent1"/>
+          </a:fillRef>
+          <a:effectRef idx="2">
+            <a:schemeClr val="accent1"/>
+          </a:effectRef>
+          <a:fontRef idx="minor">
+            <a:schemeClr val="lt1"/>
+          </a:fontRef>
+        </p:style>
+        <p:txBody>
+          <a:bodyPr rtlCol="0" anchor="ctr"/>
+          <a:lstStyle/>
+          <a:p>
+            <a:pPr algn="ctr"/>
+          </a:p>
+        </p:txBody>
+      </p:sp>
+      <p:sp>
+        <p:nvSpPr>
+          <p:cNvPr id="40" name="TextBox 39"/>
+          <p:cNvSpPr txBox="1"/>
+          <p:nvPr/>
+        </p:nvSpPr>
+        <p:spPr>
+          <a:xfrm>
+            <a:off x="576072" y="5129784"/>
+            <a:ext cx="457200" cy="274320"/>
+          </a:xfrm>
+          <a:prstGeom prst="rect">
+            <a:avLst/>
+          </a:prstGeom>
+          <a:noFill/>
+        </p:spPr>
+        <p:txBody>
+          <a:bodyPr wrap="square">
+            <a:spAutoFit/>
+          </a:bodyPr>
+          <a:lstStyle/>
+          <a:p>
+            <a:pPr algn="l"/>
+            <a:r>
+              <a:rPr sz="1200" b="1" i="0">
+                <a:solidFill>
+                  <a:srgbClr val="22C55E"/>
+                </a:solidFill>
+              </a:rPr>
+              <a:t>셀 5</a:t>
+            </a:r>
+          </a:p>
+        </p:txBody>
+      </p:sp>
+      <p:sp>
+        <p:nvSpPr>
+          <p:cNvPr id="41" name="TextBox 40"/>
+          <p:cNvSpPr txBox="1"/>
+          <p:nvPr/>
+        </p:nvSpPr>
+        <p:spPr>
+          <a:xfrm>
+            <a:off x="576072" y="5404104"/>
+            <a:ext cx="1243584" cy="274320"/>
+          </a:xfrm>
+          <a:prstGeom prst="rect">
+            <a:avLst/>
+          </a:prstGeom>
+          <a:noFill/>
+        </p:spPr>
+        <p:txBody>
+          <a:bodyPr wrap="square">
+            <a:spAutoFit/>
+          </a:bodyPr>
+          <a:lstStyle/>
+          <a:p>
+            <a:pPr algn="l"/>
+            <a:r>
+              <a:rPr sz="1100" b="0" i="0">
+                <a:solidFill>
+                  <a:srgbClr val="FFFFFF"/>
+                </a:solidFill>
+              </a:rPr>
+              <a:t>train/predict</a:t>
+            </a:r>
+          </a:p>
+        </p:txBody>
+      </p:sp>
+      <p:sp>
+        <p:nvSpPr>
+          <p:cNvPr id="42" name="Rectangle 41"/>
+          <p:cNvSpPr/>
+          <p:nvPr/>
+        </p:nvSpPr>
+        <p:spPr>
+          <a:xfrm>
+            <a:off x="1984248" y="5074920"/>
+            <a:ext cx="1371600" cy="685800"/>
+          </a:xfrm>
+          <a:prstGeom prst="rect">
+            <a:avLst/>
+          </a:prstGeom>
+          <a:solidFill>
+            <a:srgbClr val="132740"/>
+          </a:solidFill>
+          <a:ln w="12700">
+            <a:solidFill>
+              <a:srgbClr val="64748B"/>
+            </a:solidFill>
+          </a:ln>
+        </p:spPr>
+        <p:style>
+          <a:lnRef idx="1">
+            <a:schemeClr val="accent1"/>
+          </a:lnRef>
+          <a:fillRef idx="3">
+            <a:schemeClr val="accent1"/>
+          </a:fillRef>
+          <a:effectRef idx="2">
+            <a:schemeClr val="accent1"/>
+          </a:effectRef>
+          <a:fontRef idx="minor">
+            <a:schemeClr val="lt1"/>
+          </a:fontRef>
+        </p:style>
+        <p:txBody>
+          <a:bodyPr rtlCol="0" anchor="ctr"/>
+          <a:lstStyle/>
+          <a:p>
+            <a:pPr algn="ctr"/>
+          </a:p>
+        </p:txBody>
+      </p:sp>
+      <p:sp>
+        <p:nvSpPr>
+          <p:cNvPr id="43" name="TextBox 42"/>
+          <p:cNvSpPr txBox="1"/>
+          <p:nvPr/>
+        </p:nvSpPr>
+        <p:spPr>
+          <a:xfrm>
+            <a:off x="2057400" y="5129784"/>
+            <a:ext cx="457200" cy="274320"/>
+          </a:xfrm>
+          <a:prstGeom prst="rect">
+            <a:avLst/>
+          </a:prstGeom>
+          <a:noFill/>
+        </p:spPr>
+        <p:txBody>
+          <a:bodyPr wrap="square">
+            <a:spAutoFit/>
+          </a:bodyPr>
+          <a:lstStyle/>
+          <a:p>
+            <a:pPr algn="l"/>
+            <a:r>
+              <a:rPr sz="1200" b="1" i="0">
+                <a:solidFill>
+                  <a:srgbClr val="64748B"/>
+                </a:solidFill>
+              </a:rPr>
+              <a:t>셀 6</a:t>
+            </a:r>
+          </a:p>
+        </p:txBody>
+      </p:sp>
+      <p:sp>
+        <p:nvSpPr>
+          <p:cNvPr id="44" name="TextBox 43"/>
+          <p:cNvSpPr txBox="1"/>
+          <p:nvPr/>
+        </p:nvSpPr>
+        <p:spPr>
+          <a:xfrm>
+            <a:off x="2057400" y="5404104"/>
+            <a:ext cx="1243584" cy="274320"/>
+          </a:xfrm>
+          <a:prstGeom prst="rect">
+            <a:avLst/>
+          </a:prstGeom>
+          <a:noFill/>
+        </p:spPr>
+        <p:txBody>
+          <a:bodyPr wrap="square">
+            <a:spAutoFit/>
+          </a:bodyPr>
+          <a:lstStyle/>
+          <a:p>
+            <a:pPr algn="l"/>
+            <a:r>
+              <a:rPr sz="1100" b="0" i="0">
+                <a:solidFill>
+                  <a:srgbClr val="FFFFFF"/>
+                </a:solidFill>
+              </a:rPr>
+              <a:t>로컬 테스트</a:t>
+            </a:r>
+          </a:p>
+        </p:txBody>
+      </p:sp>
+      <p:sp>
+        <p:nvSpPr>
+          <p:cNvPr id="45" name="Rectangle 44"/>
+          <p:cNvSpPr/>
+          <p:nvPr/>
+        </p:nvSpPr>
+        <p:spPr>
+          <a:xfrm>
+            <a:off x="3465576" y="5074920"/>
+            <a:ext cx="1371600" cy="685800"/>
+          </a:xfrm>
+          <a:prstGeom prst="rect">
+            <a:avLst/>
+          </a:prstGeom>
+          <a:solidFill>
+            <a:srgbClr val="132740"/>
+          </a:solidFill>
+          <a:ln w="12700">
+            <a:solidFill>
+              <a:srgbClr val="22D3EE"/>
+            </a:solidFill>
+          </a:ln>
+        </p:spPr>
+        <p:style>
+          <a:lnRef idx="1">
+            <a:schemeClr val="accent1"/>
+          </a:lnRef>
+          <a:fillRef idx="3">
+            <a:schemeClr val="accent1"/>
+          </a:fillRef>
+          <a:effectRef idx="2">
+            <a:schemeClr val="accent1"/>
+          </a:effectRef>
+          <a:fontRef idx="minor">
+            <a:schemeClr val="lt1"/>
+          </a:fontRef>
+        </p:style>
+        <p:txBody>
+          <a:bodyPr rtlCol="0" anchor="ctr"/>
+          <a:lstStyle/>
+          <a:p>
+            <a:pPr algn="ctr"/>
+          </a:p>
+        </p:txBody>
+      </p:sp>
+      <p:sp>
+        <p:nvSpPr>
+          <p:cNvPr id="46" name="TextBox 45"/>
+          <p:cNvSpPr txBox="1"/>
+          <p:nvPr/>
+        </p:nvSpPr>
+        <p:spPr>
+          <a:xfrm>
+            <a:off x="3538728" y="5129784"/>
+            <a:ext cx="457200" cy="274320"/>
+          </a:xfrm>
+          <a:prstGeom prst="rect">
+            <a:avLst/>
+          </a:prstGeom>
+          <a:noFill/>
+        </p:spPr>
+        <p:txBody>
+          <a:bodyPr wrap="square">
+            <a:spAutoFit/>
+          </a:bodyPr>
+          <a:lstStyle/>
+          <a:p>
+            <a:pPr algn="l"/>
+            <a:r>
+              <a:rPr sz="1200" b="1" i="0">
+                <a:solidFill>
+                  <a:srgbClr val="22D3EE"/>
+                </a:solidFill>
+              </a:rPr>
+              <a:t>셀 7</a:t>
+            </a:r>
+          </a:p>
+        </p:txBody>
+      </p:sp>
+      <p:sp>
+        <p:nvSpPr>
+          <p:cNvPr id="47" name="TextBox 46"/>
+          <p:cNvSpPr txBox="1"/>
+          <p:nvPr/>
+        </p:nvSpPr>
+        <p:spPr>
+          <a:xfrm>
+            <a:off x="3538728" y="5404104"/>
+            <a:ext cx="1243584" cy="274320"/>
+          </a:xfrm>
+          <a:prstGeom prst="rect">
+            <a:avLst/>
+          </a:prstGeom>
+          <a:noFill/>
+        </p:spPr>
+        <p:txBody>
+          <a:bodyPr wrap="square">
+            <a:spAutoFit/>
+          </a:bodyPr>
+          <a:lstStyle/>
+          <a:p>
+            <a:pPr algn="l"/>
+            <a:r>
+              <a:rPr sz="1100" b="0" i="0">
+                <a:solidFill>
+                  <a:srgbClr val="FFFFFF"/>
+                </a:solidFill>
+              </a:rPr>
+              <a:t>git push</a:t>
+            </a:r>
+          </a:p>
+        </p:txBody>
+      </p:sp>
+      <p:sp>
+        <p:nvSpPr>
+          <p:cNvPr id="48" name="Rectangle 47"/>
+          <p:cNvSpPr/>
+          <p:nvPr/>
+        </p:nvSpPr>
+        <p:spPr>
+          <a:xfrm>
+            <a:off x="4946904" y="5074920"/>
+            <a:ext cx="1371600" cy="685800"/>
+          </a:xfrm>
+          <a:prstGeom prst="rect">
+            <a:avLst/>
+          </a:prstGeom>
+          <a:solidFill>
+            <a:srgbClr val="132740"/>
+          </a:solidFill>
+          <a:ln w="12700">
+            <a:solidFill>
+              <a:srgbClr val="F59E0B"/>
+            </a:solidFill>
+          </a:ln>
+        </p:spPr>
+        <p:style>
+          <a:lnRef idx="1">
+            <a:schemeClr val="accent1"/>
+          </a:lnRef>
+          <a:fillRef idx="3">
+            <a:schemeClr val="accent1"/>
+          </a:fillRef>
+          <a:effectRef idx="2">
+            <a:schemeClr val="accent1"/>
+          </a:effectRef>
+          <a:fontRef idx="minor">
+            <a:schemeClr val="lt1"/>
+          </a:fontRef>
+        </p:style>
+        <p:txBody>
+          <a:bodyPr rtlCol="0" anchor="ctr"/>
+          <a:lstStyle/>
+          <a:p>
+            <a:pPr algn="ctr"/>
+          </a:p>
+        </p:txBody>
+      </p:sp>
+      <p:sp>
+        <p:nvSpPr>
+          <p:cNvPr id="49" name="TextBox 48"/>
+          <p:cNvSpPr txBox="1"/>
+          <p:nvPr/>
+        </p:nvSpPr>
+        <p:spPr>
+          <a:xfrm>
+            <a:off x="5020056" y="5129784"/>
+            <a:ext cx="457200" cy="274320"/>
+          </a:xfrm>
+          <a:prstGeom prst="rect">
+            <a:avLst/>
+          </a:prstGeom>
+          <a:noFill/>
+        </p:spPr>
+        <p:txBody>
+          <a:bodyPr wrap="square">
+            <a:spAutoFit/>
+          </a:bodyPr>
+          <a:lstStyle/>
+          <a:p>
+            <a:pPr algn="l"/>
+            <a:r>
+              <a:rPr sz="1200" b="1" i="0">
+                <a:solidFill>
+                  <a:srgbClr val="F59E0B"/>
+                </a:solidFill>
+              </a:rPr>
+              <a:t>셀 8</a:t>
+            </a:r>
+          </a:p>
+        </p:txBody>
+      </p:sp>
+      <p:sp>
+        <p:nvSpPr>
+          <p:cNvPr id="50" name="TextBox 49"/>
+          <p:cNvSpPr txBox="1"/>
+          <p:nvPr/>
+        </p:nvSpPr>
+        <p:spPr>
+          <a:xfrm>
+            <a:off x="5020056" y="5404104"/>
+            <a:ext cx="1243584" cy="274320"/>
+          </a:xfrm>
+          <a:prstGeom prst="rect">
+            <a:avLst/>
+          </a:prstGeom>
+          <a:noFill/>
+        </p:spPr>
+        <p:txBody>
+          <a:bodyPr wrap="square">
+            <a:spAutoFit/>
+          </a:bodyPr>
+          <a:lstStyle/>
+          <a:p>
+            <a:pPr algn="l"/>
+            <a:r>
+              <a:rPr sz="1100" b="0" i="0">
+                <a:solidFill>
+                  <a:srgbClr val="FFFFFF"/>
+                </a:solidFill>
+              </a:rPr>
+              <a:t>KST 06:00 자동</a:t>
+            </a:r>
+          </a:p>
+        </p:txBody>
+      </p:sp>
+      <p:sp>
+        <p:nvSpPr>
+          <p:cNvPr id="51" name="Rectangle 50"/>
+          <p:cNvSpPr/>
+          <p:nvPr/>
+        </p:nvSpPr>
+        <p:spPr>
+          <a:xfrm>
+            <a:off x="6400800" y="3822191"/>
+            <a:ext cx="5577840" cy="2743200"/>
+          </a:xfrm>
+          <a:prstGeom prst="rect">
+            <a:avLst/>
+          </a:prstGeom>
+          <a:solidFill>
+            <a:srgbClr val="0F1E30"/>
+          </a:solidFill>
+          <a:ln w="19050">
+            <a:solidFill>
+              <a:srgbClr val="22C55E"/>
+            </a:solidFill>
+          </a:ln>
+        </p:spPr>
+        <p:style>
+          <a:lnRef idx="1">
+            <a:schemeClr val="accent1"/>
+          </a:lnRef>
+          <a:fillRef idx="3">
+            <a:schemeClr val="accent1"/>
+          </a:fillRef>
+          <a:effectRef idx="2">
+            <a:schemeClr val="accent1"/>
+          </a:effectRef>
+          <a:fontRef idx="minor">
+            <a:schemeClr val="lt1"/>
+          </a:fontRef>
+        </p:style>
+        <p:txBody>
+          <a:bodyPr rtlCol="0" anchor="ctr"/>
+          <a:lstStyle/>
+          <a:p>
+            <a:pPr algn="ctr"/>
+          </a:p>
+        </p:txBody>
+      </p:sp>
+      <p:sp>
+        <p:nvSpPr>
+          <p:cNvPr id="52" name="TextBox 51"/>
+          <p:cNvSpPr txBox="1"/>
+          <p:nvPr/>
+        </p:nvSpPr>
+        <p:spPr>
+          <a:xfrm>
+            <a:off x="6583680" y="3913632"/>
+            <a:ext cx="5303520" cy="347472"/>
+          </a:xfrm>
+          <a:prstGeom prst="rect">
+            <a:avLst/>
+          </a:prstGeom>
+          <a:noFill/>
+        </p:spPr>
+        <p:txBody>
+          <a:bodyPr wrap="square">
+            <a:spAutoFit/>
+          </a:bodyPr>
+          <a:lstStyle/>
+          <a:p>
+            <a:pPr algn="l"/>
+            <a:r>
+              <a:rPr sz="1400" b="1" i="0">
+                <a:solidFill>
+                  <a:srgbClr val="22C55E"/>
+                </a:solidFill>
+              </a:rPr>
+              <a:t>Streamlit 대시보드 기능</a:t>
+            </a:r>
+          </a:p>
+        </p:txBody>
+      </p:sp>
+      <p:sp>
+        <p:nvSpPr>
+          <p:cNvPr id="53" name="TextBox 52"/>
+          <p:cNvSpPr txBox="1"/>
+          <p:nvPr/>
+        </p:nvSpPr>
+        <p:spPr>
+          <a:xfrm>
+            <a:off x="6583680" y="4343400"/>
+            <a:ext cx="731520" cy="292608"/>
+          </a:xfrm>
+          <a:prstGeom prst="rect">
+            <a:avLst/>
+          </a:prstGeom>
+          <a:noFill/>
+        </p:spPr>
+        <p:txBody>
+          <a:bodyPr wrap="square">
+            <a:spAutoFit/>
+          </a:bodyPr>
+          <a:lstStyle/>
+          <a:p>
+            <a:pPr algn="l"/>
+            <a:r>
+              <a:rPr sz="1200" b="1" i="0">
+                <a:solidFill>
+                  <a:srgbClr val="22C55E"/>
+                </a:solidFill>
+              </a:rPr>
+              <a:t>▸  TAB 1</a:t>
+            </a:r>
+          </a:p>
+        </p:txBody>
+      </p:sp>
+      <p:sp>
+        <p:nvSpPr>
+          <p:cNvPr id="54" name="TextBox 53"/>
+          <p:cNvSpPr txBox="1"/>
+          <p:nvPr/>
+        </p:nvSpPr>
+        <p:spPr>
+          <a:xfrm>
+            <a:off x="7360920" y="4343400"/>
+            <a:ext cx="4480560" cy="292608"/>
+          </a:xfrm>
+          <a:prstGeom prst="rect">
+            <a:avLst/>
+          </a:prstGeom>
+          <a:noFill/>
+        </p:spPr>
+        <p:txBody>
+          <a:bodyPr wrap="square">
+            <a:spAutoFit/>
+          </a:bodyPr>
+          <a:lstStyle/>
+          <a:p>
+            <a:pPr algn="l"/>
+            <a:r>
+              <a:rPr sz="1200" b="0" i="0">
+                <a:solidFill>
+                  <a:srgbClr val="94A3B8"/>
+                </a:solidFill>
+              </a:rPr>
+              <a:t>실시간 환율 차트 + 5분 자동 갱신</a:t>
+            </a:r>
+          </a:p>
+        </p:txBody>
+      </p:sp>
+      <p:sp>
+        <p:nvSpPr>
+          <p:cNvPr id="55" name="TextBox 54"/>
+          <p:cNvSpPr txBox="1"/>
+          <p:nvPr/>
+        </p:nvSpPr>
+        <p:spPr>
+          <a:xfrm>
+            <a:off x="6583680" y="4727448"/>
+            <a:ext cx="731520" cy="292608"/>
+          </a:xfrm>
+          <a:prstGeom prst="rect">
+            <a:avLst/>
+          </a:prstGeom>
+          <a:noFill/>
+        </p:spPr>
+        <p:txBody>
+          <a:bodyPr wrap="square">
+            <a:spAutoFit/>
+          </a:bodyPr>
+          <a:lstStyle/>
+          <a:p>
+            <a:pPr algn="l"/>
+            <a:r>
+              <a:rPr sz="1200" b="1" i="0">
+                <a:solidFill>
+                  <a:srgbClr val="22D3EE"/>
+                </a:solidFill>
+              </a:rPr>
+              <a:t>▸  TAB 2</a:t>
+            </a:r>
+          </a:p>
+        </p:txBody>
+      </p:sp>
+      <p:sp>
+        <p:nvSpPr>
+          <p:cNvPr id="56" name="TextBox 55"/>
+          <p:cNvSpPr txBox="1"/>
+          <p:nvPr/>
+        </p:nvSpPr>
+        <p:spPr>
+          <a:xfrm>
+            <a:off x="7360920" y="4727448"/>
+            <a:ext cx="4480560" cy="292608"/>
+          </a:xfrm>
+          <a:prstGeom prst="rect">
+            <a:avLst/>
+          </a:prstGeom>
+          <a:noFill/>
+        </p:spPr>
+        <p:txBody>
+          <a:bodyPr wrap="square">
+            <a:spAutoFit/>
+          </a:bodyPr>
+          <a:lstStyle/>
+          <a:p>
+            <a:pPr algn="l"/>
+            <a:r>
+              <a:rPr sz="1200" b="0" i="0">
+                <a:solidFill>
+                  <a:srgbClr val="94A3B8"/>
+                </a:solidFill>
+              </a:rPr>
+              <a:t>D+1~D+22 예측 (LGB 실시간 추론)</a:t>
+            </a:r>
+          </a:p>
+        </p:txBody>
+      </p:sp>
+      <p:sp>
+        <p:nvSpPr>
+          <p:cNvPr id="57" name="TextBox 56"/>
+          <p:cNvSpPr txBox="1"/>
+          <p:nvPr/>
+        </p:nvSpPr>
+        <p:spPr>
+          <a:xfrm>
+            <a:off x="6583680" y="5111496"/>
+            <a:ext cx="731520" cy="292608"/>
+          </a:xfrm>
+          <a:prstGeom prst="rect">
+            <a:avLst/>
+          </a:prstGeom>
+          <a:noFill/>
+        </p:spPr>
+        <p:txBody>
+          <a:bodyPr wrap="square">
+            <a:spAutoFit/>
+          </a:bodyPr>
+          <a:lstStyle/>
+          <a:p>
+            <a:pPr algn="l"/>
+            <a:r>
+              <a:rPr sz="1200" b="1" i="0">
+                <a:solidFill>
+                  <a:srgbClr val="F59E0B"/>
+                </a:solidFill>
+              </a:rPr>
+              <a:t>▸  TAB 3</a:t>
+            </a:r>
+          </a:p>
+        </p:txBody>
+      </p:sp>
+      <p:sp>
+        <p:nvSpPr>
+          <p:cNvPr id="58" name="TextBox 57"/>
+          <p:cNvSpPr txBox="1"/>
+          <p:nvPr/>
+        </p:nvSpPr>
+        <p:spPr>
+          <a:xfrm>
+            <a:off x="7360920" y="5111496"/>
+            <a:ext cx="4480560" cy="292608"/>
+          </a:xfrm>
+          <a:prstGeom prst="rect">
+            <a:avLst/>
+          </a:prstGeom>
+          <a:noFill/>
+        </p:spPr>
+        <p:txBody>
+          <a:bodyPr wrap="square">
+            <a:spAutoFit/>
+          </a:bodyPr>
+          <a:lstStyle/>
+          <a:p>
+            <a:pPr algn="l"/>
+            <a:r>
+              <a:rPr sz="1200" b="0" i="0">
+                <a:solidFill>
+                  <a:srgbClr val="94A3B8"/>
+                </a:solidFill>
+              </a:rPr>
+              <a:t>성능 비교 + Baseline + 유의성 표시</a:t>
+            </a:r>
+          </a:p>
+        </p:txBody>
+      </p:sp>
+      <p:sp>
+        <p:nvSpPr>
+          <p:cNvPr id="59" name="TextBox 58"/>
+          <p:cNvSpPr txBox="1"/>
+          <p:nvPr/>
+        </p:nvSpPr>
+        <p:spPr>
+          <a:xfrm>
+            <a:off x="6583680" y="5495544"/>
+            <a:ext cx="731520" cy="292608"/>
+          </a:xfrm>
+          <a:prstGeom prst="rect">
+            <a:avLst/>
+          </a:prstGeom>
+          <a:noFill/>
+        </p:spPr>
+        <p:txBody>
+          <a:bodyPr wrap="square">
+            <a:spAutoFit/>
+          </a:bodyPr>
+          <a:lstStyle/>
+          <a:p>
+            <a:pPr algn="l"/>
+            <a:r>
+              <a:rPr sz="1200" b="1" i="0">
+                <a:solidFill>
+                  <a:srgbClr val="94A3B8"/>
+                </a:solidFill>
+              </a:rPr>
+              <a:t>▸  TAB 4</a:t>
+            </a:r>
+          </a:p>
+        </p:txBody>
+      </p:sp>
+      <p:sp>
+        <p:nvSpPr>
+          <p:cNvPr id="60" name="TextBox 59"/>
+          <p:cNvSpPr txBox="1"/>
+          <p:nvPr/>
+        </p:nvSpPr>
+        <p:spPr>
+          <a:xfrm>
+            <a:off x="7360920" y="5495544"/>
+            <a:ext cx="4480560" cy="292608"/>
+          </a:xfrm>
+          <a:prstGeom prst="rect">
+            <a:avLst/>
+          </a:prstGeom>
+          <a:noFill/>
+        </p:spPr>
+        <p:txBody>
+          <a:bodyPr wrap="square">
+            <a:spAutoFit/>
+          </a:bodyPr>
+          <a:lstStyle/>
+          <a:p>
+            <a:pPr algn="l"/>
+            <a:r>
+              <a:rPr sz="1200" b="0" i="0">
+                <a:solidFill>
+                  <a:srgbClr val="94A3B8"/>
+                </a:solidFill>
+              </a:rPr>
+              <a:t>거시지표 (VIX·DXY·WTI·금리차)</a:t>
+            </a:r>
+          </a:p>
+        </p:txBody>
+      </p:sp>
+    </p:spTree>
+  </p:cSld>
+  <p:clrMapOvr>
+    <a:masterClrMapping/>
+  </p:clrMapOvr>
+</p:sld>
+</file>
+
+<file path=ppt/slides/slide9.xml><?xml version="1.0" encoding="utf-8"?>
 <p:sld xmlns:a="http://schemas.openxmlformats.org/drawingml/2006/main" xmlns:p="http://schemas.openxmlformats.org/presentationml/2006/main" xmlns:r="http://schemas.openxmlformats.org/officeDocument/2006/relationships">
   <p:cSld>
     <p:spTree>
